--- a/10-Knowledge-Products/KP1-GEA/videos/module_3/en/decks/KP1_M3_3.4_Deck_v0.2.pptx
+++ b/10-Knowledge-Products/KP1-GEA/videos/module_3/en/decks/KP1_M3_3.4_Deck_v0.2.pptx
@@ -14,15 +14,15 @@
     <p:handoutMasterId r:id="rId47"/>
   </p:handoutMasterIdLst>
   <p:sldIdLst>
-    <p:sldId id="2681" r:id="rId8"/>
-    <p:sldId id="2719" r:id="rId41"/>
-    <p:sldId id="2720" r:id="rId42"/>
-    <p:sldId id="2721" r:id="rId43"/>
     <p:sldId id="2722" r:id="rId44"/>
     <p:sldId id="2723" r:id="rId45"/>
     <p:sldId id="2724" r:id="rId17"/>
     <p:sldId id="2725" r:id="rId16"/>
     <p:sldId id="2726" r:id="rId15"/>
+    <p:sldId id="2727" r:id="rId14"/>
+    <p:sldId id="2728" r:id="rId13"/>
+    <p:sldId id="2729" r:id="rId12"/>
+    <p:sldId id="2730" r:id="rId11"/>
   </p:sldIdLst>
   <p:sldSz cx="12192000" cy="6858000"/>
   <p:notesSz cx="6858000" cy="9144000"/>
@@ -889,286 +889,6 @@
 </p:notesMaster>
 </file>
 
-<file path=ppt/notesSlides/notesSlide21.xml><?xml version="1.0" encoding="utf-8"?>
-<p:notes xmlns:a="http://schemas.openxmlformats.org/drawingml/2006/main" xmlns:p="http://schemas.openxmlformats.org/presentationml/2006/main" xmlns:r="http://schemas.openxmlformats.org/officeDocument/2006/relationships">
-  <p:cSld>
-    <p:spTree>
-      <p:nvGrpSpPr>
-        <p:cNvPr id="1" name=""/>
-        <p:cNvGrpSpPr/>
-        <p:nvPr/>
-      </p:nvGrpSpPr>
-      <p:grpSpPr>
-        <a:xfrm>
-          <a:off x="0" y="0"/>
-          <a:ext cx="0" cy="0"/>
-          <a:chOff x="0" y="0"/>
-          <a:chExt cx="0" cy="0"/>
-        </a:xfrm>
-      </p:grpSpPr>
-      <p:sp>
-        <p:nvSpPr>
-          <p:cNvPr id="2" name="Slide Image Placeholder 1"/>
-          <p:cNvSpPr>
-            <a:spLocks noGrp="1"/>
-          </p:cNvSpPr>
-          <p:nvPr>
-            <p:ph type="sldImg" idx="2"/>
-          </p:nvPr>
-        </p:nvSpPr>
-        <p:spPr/>
-      </p:sp>
-      <p:sp>
-        <p:nvSpPr>
-          <p:cNvPr id="3" name="Notes Placeholder 2"/>
-          <p:cNvSpPr>
-            <a:spLocks noGrp="1"/>
-          </p:cNvSpPr>
-          <p:nvPr>
-            <p:ph type="body" idx="3" sz="quarter"/>
-          </p:nvPr>
-        </p:nvSpPr>
-        <p:spPr/>
-        <p:txBody>
-          <a:bodyPr/>
-          <a:lstStyle/>
-          <a:p>
-            <a:r>
-              <a:t>Title card for standalone video 3.4. Content slides are identical to the corresponding section of the combined deck KP1_M3_Deck_v0.2.pptx; voice-over is in each slide’s notes.</a:t>
-            </a:r>
-          </a:p>
-        </p:txBody>
-      </p:sp>
-      <p:sp>
-        <p:nvSpPr>
-          <p:cNvPr id="4" name="Slide Number Placeholder 3"/>
-          <p:cNvSpPr>
-            <a:spLocks noGrp="1"/>
-          </p:cNvSpPr>
-          <p:nvPr>
-            <p:ph type="sldNum" idx="5" sz="quarter"/>
-          </p:nvPr>
-        </p:nvSpPr>
-        <p:spPr/>
-      </p:sp>
-    </p:spTree>
-  </p:cSld>
-  <p:clrMapOvr>
-    <a:masterClrMapping/>
-  </p:clrMapOvr>
-</p:notes>
-</file>
-
-<file path=ppt/notesSlides/notesSlide26.xml><?xml version="1.0" encoding="utf-8"?>
-<p:notes xmlns:a="http://schemas.openxmlformats.org/drawingml/2006/main" xmlns:p="http://schemas.openxmlformats.org/presentationml/2006/main" xmlns:r="http://schemas.openxmlformats.org/officeDocument/2006/relationships">
-  <p:cSld>
-    <p:spTree>
-      <p:nvGrpSpPr>
-        <p:cNvPr id="1" name=""/>
-        <p:cNvGrpSpPr/>
-        <p:nvPr/>
-      </p:nvGrpSpPr>
-      <p:grpSpPr>
-        <a:xfrm>
-          <a:off x="0" y="0"/>
-          <a:ext cx="0" cy="0"/>
-          <a:chOff x="0" y="0"/>
-          <a:chExt cx="0" cy="0"/>
-        </a:xfrm>
-      </p:grpSpPr>
-      <p:sp>
-        <p:nvSpPr>
-          <p:cNvPr id="2" name="Slide Image Placeholder 1"/>
-          <p:cNvSpPr>
-            <a:spLocks noGrp="1"/>
-          </p:cNvSpPr>
-          <p:nvPr>
-            <p:ph type="sldImg" idx="2"/>
-          </p:nvPr>
-        </p:nvSpPr>
-        <p:spPr/>
-      </p:sp>
-      <p:sp>
-        <p:nvSpPr>
-          <p:cNvPr id="3" name="Notes Placeholder 2"/>
-          <p:cNvSpPr>
-            <a:spLocks noGrp="1"/>
-          </p:cNvSpPr>
-          <p:nvPr>
-            <p:ph type="body" idx="3" sz="quarter"/>
-          </p:nvPr>
-        </p:nvSpPr>
-        <p:spPr/>
-        <p:txBody>
-          <a:bodyPr/>
-          <a:lstStyle/>
-          <a:p>
-            <a:r>
-              <a:t>VO, slide 1: The repository holds the architecture; the Board is what gives it authority. Without a governance board the architecture is a document people can ignore. With a real one — that can say no — it becomes the place every significant digital decision passes through.</a:t>
-            </a:r>
-          </a:p>
-        </p:txBody>
-      </p:sp>
-      <p:sp>
-        <p:nvSpPr>
-          <p:cNvPr id="4" name="Slide Number Placeholder 3"/>
-          <p:cNvSpPr>
-            <a:spLocks noGrp="1"/>
-          </p:cNvSpPr>
-          <p:nvPr>
-            <p:ph type="sldNum" idx="5" sz="quarter"/>
-          </p:nvPr>
-        </p:nvSpPr>
-        <p:spPr/>
-      </p:sp>
-    </p:spTree>
-  </p:cSld>
-  <p:clrMapOvr>
-    <a:masterClrMapping/>
-  </p:clrMapOvr>
-</p:notes>
-</file>
-
-<file path=ppt/notesSlides/notesSlide27.xml><?xml version="1.0" encoding="utf-8"?>
-<p:notes xmlns:a="http://schemas.openxmlformats.org/drawingml/2006/main" xmlns:p="http://schemas.openxmlformats.org/presentationml/2006/main" xmlns:r="http://schemas.openxmlformats.org/officeDocument/2006/relationships">
-  <p:cSld>
-    <p:spTree>
-      <p:nvGrpSpPr>
-        <p:cNvPr id="1" name=""/>
-        <p:cNvGrpSpPr/>
-        <p:nvPr/>
-      </p:nvGrpSpPr>
-      <p:grpSpPr>
-        <a:xfrm>
-          <a:off x="0" y="0"/>
-          <a:ext cx="0" cy="0"/>
-          <a:chOff x="0" y="0"/>
-          <a:chExt cx="0" cy="0"/>
-        </a:xfrm>
-      </p:grpSpPr>
-      <p:sp>
-        <p:nvSpPr>
-          <p:cNvPr id="2" name="Slide Image Placeholder 1"/>
-          <p:cNvSpPr>
-            <a:spLocks noGrp="1"/>
-          </p:cNvSpPr>
-          <p:nvPr>
-            <p:ph type="sldImg" idx="2"/>
-          </p:nvPr>
-        </p:nvSpPr>
-        <p:spPr/>
-      </p:sp>
-      <p:sp>
-        <p:nvSpPr>
-          <p:cNvPr id="3" name="Notes Placeholder 2"/>
-          <p:cNvSpPr>
-            <a:spLocks noGrp="1"/>
-          </p:cNvSpPr>
-          <p:nvPr>
-            <p:ph type="body" idx="3" sz="quarter"/>
-          </p:nvPr>
-        </p:nvSpPr>
-        <p:spPr/>
-        <p:txBody>
-          <a:bodyPr/>
-          <a:lstStyle/>
-          <a:p>
-            <a:r>
-              <a:t>VO: Start with the one thing that matters. The Board must be binding, not advisory. An advisory board looks at a project, offers an opinion, and the project does whatever it was going to do. That is governance theatre — it produces minutes, not decisions. A binding board's rulings are a condition of proceeding: a project told to consume the shared identity platform does so, or it does not get funded. If you cannot get binding authority, you do not yet have a governance board. You have a discussion group.</a:t>
-            </a:r>
-          </a:p>
-        </p:txBody>
-      </p:sp>
-      <p:sp>
-        <p:nvSpPr>
-          <p:cNvPr id="4" name="Slide Number Placeholder 3"/>
-          <p:cNvSpPr>
-            <a:spLocks noGrp="1"/>
-          </p:cNvSpPr>
-          <p:nvPr>
-            <p:ph type="sldNum" idx="5" sz="quarter"/>
-          </p:nvPr>
-        </p:nvSpPr>
-        <p:spPr/>
-      </p:sp>
-    </p:spTree>
-  </p:cSld>
-  <p:clrMapOvr>
-    <a:masterClrMapping/>
-  </p:clrMapOvr>
-</p:notes>
-</file>
-
-<file path=ppt/notesSlides/notesSlide28.xml><?xml version="1.0" encoding="utf-8"?>
-<p:notes xmlns:a="http://schemas.openxmlformats.org/drawingml/2006/main" xmlns:p="http://schemas.openxmlformats.org/presentationml/2006/main" xmlns:r="http://schemas.openxmlformats.org/officeDocument/2006/relationships">
-  <p:cSld>
-    <p:spTree>
-      <p:nvGrpSpPr>
-        <p:cNvPr id="1" name=""/>
-        <p:cNvGrpSpPr/>
-        <p:nvPr/>
-      </p:nvGrpSpPr>
-      <p:grpSpPr>
-        <a:xfrm>
-          <a:off x="0" y="0"/>
-          <a:ext cx="0" cy="0"/>
-          <a:chOff x="0" y="0"/>
-          <a:chExt cx="0" cy="0"/>
-        </a:xfrm>
-      </p:grpSpPr>
-      <p:sp>
-        <p:nvSpPr>
-          <p:cNvPr id="2" name="Slide Image Placeholder 1"/>
-          <p:cNvSpPr>
-            <a:spLocks noGrp="1"/>
-          </p:cNvSpPr>
-          <p:nvPr>
-            <p:ph type="sldImg" idx="2"/>
-          </p:nvPr>
-        </p:nvSpPr>
-        <p:spPr/>
-      </p:sp>
-      <p:sp>
-        <p:nvSpPr>
-          <p:cNvPr id="3" name="Notes Placeholder 2"/>
-          <p:cNvSpPr>
-            <a:spLocks noGrp="1"/>
-          </p:cNvSpPr>
-          <p:nvPr>
-            <p:ph type="body" idx="3" sz="quarter"/>
-          </p:nvPr>
-        </p:nvSpPr>
-        <p:spPr/>
-        <p:txBody>
-          <a:bodyPr/>
-          <a:lstStyle/>
-          <a:p>
-            <a:r>
-              <a:t>VO: Who chairs it decides whether no sticks. The chair is your Chief Digitalisation Officer or its equivalent — or, in a smaller government, the minister directly. Senior enough that when the Board declines a powerful ministry's pet project, the decision holds. Note who does not chair it: you, the architect. You prepare the Board, you advise it, you bring the analysis. The authority to decide sits with someone who can carry it politically. The architect informs; the chair decides.</a:t>
-            </a:r>
-          </a:p>
-        </p:txBody>
-      </p:sp>
-      <p:sp>
-        <p:nvSpPr>
-          <p:cNvPr id="4" name="Slide Number Placeholder 3"/>
-          <p:cNvSpPr>
-            <a:spLocks noGrp="1"/>
-          </p:cNvSpPr>
-          <p:nvPr>
-            <p:ph type="sldNum" idx="5" sz="quarter"/>
-          </p:nvPr>
-        </p:nvSpPr>
-        <p:spPr/>
-      </p:sp>
-    </p:spTree>
-  </p:cSld>
-  <p:clrMapOvr>
-    <a:masterClrMapping/>
-  </p:clrMapOvr>
-</p:notes>
-</file>
-
 <file path=ppt/notesSlides/notesSlide29.xml><?xml version="1.0" encoding="utf-8"?>
 <p:notes xmlns:a="http://schemas.openxmlformats.org/drawingml/2006/main" xmlns:p="http://schemas.openxmlformats.org/presentationml/2006/main" xmlns:r="http://schemas.openxmlformats.org/officeDocument/2006/relationships">
   <p:cSld>
@@ -1214,7 +934,7 @@
           <a:lstStyle/>
           <a:p>
             <a:r>
-              <a:t>VO: Who sits on it: the people whose systems the decisions affect. The sector ministry CIOs. The owners of the major state registries — the identity authority, the population register. Where data-sharing is in play, the data-protection regulator. And, where useful, one external advisor for perspective. Keep it small enough to decide and broad enough that the decisions are owned by the people who must live with them. A Board of the right twelve is better than a Board of the convenient forty.</a:t>
+              <a:t>Title card — the cold open. The hosts name the module, the video number, the title and the single message on this slide; no scripted narration. Hold until the opener begins; the opener is narrated on the next slide.</a:t>
             </a:r>
           </a:p>
         </p:txBody>
@@ -1284,7 +1004,7 @@
           <a:lstStyle/>
           <a:p>
             <a:r>
-              <a:t>VO: Set a cadence that governs without becoming the bottleneck. Quarterly main meetings to review the architecture as a whole — what changed, what is drifting, what to prioritise. And a fast ad-hoc path for urgent project decisions, so a programme on a deadline is not stuck for three months waiting for the next quarterly. If the Board is slow, projects will route around it, and you are back to no governance. Binding authority plus responsiveness is what keeps projects coming through the front door.</a:t>
+              <a:t>VO: The repository holds the architecture; the Board is what gives it authority. Without a governance board the architecture is a document people can ignore. With a real one — that can say no — it becomes the place every significant digital decision passes through.</a:t>
             </a:r>
           </a:p>
         </p:txBody>
@@ -1354,7 +1074,7 @@
           <a:lstStyle/>
           <a:p>
             <a:r>
-              <a:t>VO: There is a deeper reason the Board matters. Redesigning how government serves citizens needs the business side and the IT side to decide together — and they need a regular place to do it. The Board is that place. The repository gives them the shared picture; the metamodel gives them shared words; the Board gives them the shared rhythm — a standing forum where, four times a year and whenever it is urgent, business and IT sit down and decide together. That standing rhythm is part of what an EA provides that no single project ever can.</a:t>
+              <a:t>VO: Start with the one thing that matters. The Board must be binding, not advisory. An advisory board looks at a project, offers an opinion, and the project does whatever it was going to do. That is governance theatre — it produces minutes, not decisions. A binding board's rulings are a condition of proceeding: a project told to consume the shared identity platform does so, or it does not get funded. If you cannot get binding authority, you do not yet have a governance board. You have a discussion group.</a:t>
             </a:r>
           </a:p>
         </p:txBody>
@@ -1424,13 +1144,7 @@
           <a:lstStyle/>
           <a:p>
             <a:r>
-              <a:t>PRACTICE BOX (on-screen only — never read it, never paraphrase it, never point at it). It replaces the narrated handoff: this video ends on the recap and the Sources slide.</a:t>
-            </a:r>
-          </a:p>
-          <a:p/>
-          <a:p>
-            <a:r>
-              <a:t>VO: Stand up a Board that can say no: binding, not advisory, chaired by someone senior enough that the no sticks, made of the people whose systems are affected, on a rhythm that governs without blocking.</a:t>
+              <a:t>VO: Who chairs it decides whether no sticks. The chair is your Chief Digitalisation Officer or its equivalent — or, in a smaller government, the minister directly. Senior enough that when the Board declines a powerful ministry's pet project, the decision holds. Note who does not chair it: you, the architect. You prepare the Board, you advise it, you bring the analysis. The authority to decide sits with someone who can carry it politically. The architect informs; the chair decides.</a:t>
             </a:r>
           </a:p>
         </p:txBody>
@@ -1456,6 +1170,292 @@
 </file>
 
 <file path=ppt/notesSlides/notesSlide33.xml><?xml version="1.0" encoding="utf-8"?>
+<p:notes xmlns:a="http://schemas.openxmlformats.org/drawingml/2006/main" xmlns:p="http://schemas.openxmlformats.org/presentationml/2006/main" xmlns:r="http://schemas.openxmlformats.org/officeDocument/2006/relationships">
+  <p:cSld>
+    <p:spTree>
+      <p:nvGrpSpPr>
+        <p:cNvPr id="1" name=""/>
+        <p:cNvGrpSpPr/>
+        <p:nvPr/>
+      </p:nvGrpSpPr>
+      <p:grpSpPr>
+        <a:xfrm>
+          <a:off x="0" y="0"/>
+          <a:ext cx="0" cy="0"/>
+          <a:chOff x="0" y="0"/>
+          <a:chExt cx="0" cy="0"/>
+        </a:xfrm>
+      </p:grpSpPr>
+      <p:sp>
+        <p:nvSpPr>
+          <p:cNvPr id="2" name="Slide Image Placeholder 1"/>
+          <p:cNvSpPr>
+            <a:spLocks noGrp="1"/>
+          </p:cNvSpPr>
+          <p:nvPr>
+            <p:ph type="sldImg" idx="2"/>
+          </p:nvPr>
+        </p:nvSpPr>
+        <p:spPr/>
+      </p:sp>
+      <p:sp>
+        <p:nvSpPr>
+          <p:cNvPr id="3" name="Notes Placeholder 2"/>
+          <p:cNvSpPr>
+            <a:spLocks noGrp="1"/>
+          </p:cNvSpPr>
+          <p:nvPr>
+            <p:ph type="body" idx="3" sz="quarter"/>
+          </p:nvPr>
+        </p:nvSpPr>
+        <p:spPr/>
+        <p:txBody>
+          <a:bodyPr/>
+          <a:lstStyle/>
+          <a:p>
+            <a:r>
+              <a:t>VO: Who sits on it: the people whose systems the decisions affect. The sector ministry CIOs. The owners of the major state registries — the identity authority, the population register. Where data-sharing is in play, the data-protection regulator. And, where useful, one external advisor for perspective. Keep it small enough to decide and broad enough that the decisions are owned by the people who must live with them. A Board of the right twelve is better than a Board of the convenient forty.</a:t>
+            </a:r>
+          </a:p>
+        </p:txBody>
+      </p:sp>
+      <p:sp>
+        <p:nvSpPr>
+          <p:cNvPr id="4" name="Slide Number Placeholder 3"/>
+          <p:cNvSpPr>
+            <a:spLocks noGrp="1"/>
+          </p:cNvSpPr>
+          <p:nvPr>
+            <p:ph type="sldNum" idx="5" sz="quarter"/>
+          </p:nvPr>
+        </p:nvSpPr>
+        <p:spPr/>
+      </p:sp>
+    </p:spTree>
+  </p:cSld>
+  <p:clrMapOvr>
+    <a:masterClrMapping/>
+  </p:clrMapOvr>
+</p:notes>
+</file>
+
+<file path=ppt/notesSlides/notesSlide34.xml><?xml version="1.0" encoding="utf-8"?>
+<p:notes xmlns:a="http://schemas.openxmlformats.org/drawingml/2006/main" xmlns:p="http://schemas.openxmlformats.org/presentationml/2006/main" xmlns:r="http://schemas.openxmlformats.org/officeDocument/2006/relationships">
+  <p:cSld>
+    <p:spTree>
+      <p:nvGrpSpPr>
+        <p:cNvPr id="1" name=""/>
+        <p:cNvGrpSpPr/>
+        <p:nvPr/>
+      </p:nvGrpSpPr>
+      <p:grpSpPr>
+        <a:xfrm>
+          <a:off x="0" y="0"/>
+          <a:ext cx="0" cy="0"/>
+          <a:chOff x="0" y="0"/>
+          <a:chExt cx="0" cy="0"/>
+        </a:xfrm>
+      </p:grpSpPr>
+      <p:sp>
+        <p:nvSpPr>
+          <p:cNvPr id="2" name="Slide Image Placeholder 1"/>
+          <p:cNvSpPr>
+            <a:spLocks noGrp="1"/>
+          </p:cNvSpPr>
+          <p:nvPr>
+            <p:ph type="sldImg" idx="2"/>
+          </p:nvPr>
+        </p:nvSpPr>
+        <p:spPr/>
+      </p:sp>
+      <p:sp>
+        <p:nvSpPr>
+          <p:cNvPr id="3" name="Notes Placeholder 2"/>
+          <p:cNvSpPr>
+            <a:spLocks noGrp="1"/>
+          </p:cNvSpPr>
+          <p:nvPr>
+            <p:ph type="body" idx="3" sz="quarter"/>
+          </p:nvPr>
+        </p:nvSpPr>
+        <p:spPr/>
+        <p:txBody>
+          <a:bodyPr/>
+          <a:lstStyle/>
+          <a:p>
+            <a:r>
+              <a:t>VO: Set a cadence that governs without becoming the bottleneck. Quarterly main meetings to review the architecture as a whole — what changed, what is drifting, what to prioritise. And a fast ad-hoc path for urgent project decisions, so a programme on a deadline is not stuck for three months waiting for the next quarterly. If the Board is slow, projects will route around it, and you are back to no governance. Binding authority plus responsiveness is what keeps projects coming through the front door.</a:t>
+            </a:r>
+          </a:p>
+        </p:txBody>
+      </p:sp>
+      <p:sp>
+        <p:nvSpPr>
+          <p:cNvPr id="4" name="Slide Number Placeholder 3"/>
+          <p:cNvSpPr>
+            <a:spLocks noGrp="1"/>
+          </p:cNvSpPr>
+          <p:nvPr>
+            <p:ph type="sldNum" idx="5" sz="quarter"/>
+          </p:nvPr>
+        </p:nvSpPr>
+        <p:spPr/>
+      </p:sp>
+    </p:spTree>
+  </p:cSld>
+  <p:clrMapOvr>
+    <a:masterClrMapping/>
+  </p:clrMapOvr>
+</p:notes>
+</file>
+
+<file path=ppt/notesSlides/notesSlide35.xml><?xml version="1.0" encoding="utf-8"?>
+<p:notes xmlns:a="http://schemas.openxmlformats.org/drawingml/2006/main" xmlns:p="http://schemas.openxmlformats.org/presentationml/2006/main" xmlns:r="http://schemas.openxmlformats.org/officeDocument/2006/relationships">
+  <p:cSld>
+    <p:spTree>
+      <p:nvGrpSpPr>
+        <p:cNvPr id="1" name=""/>
+        <p:cNvGrpSpPr/>
+        <p:nvPr/>
+      </p:nvGrpSpPr>
+      <p:grpSpPr>
+        <a:xfrm>
+          <a:off x="0" y="0"/>
+          <a:ext cx="0" cy="0"/>
+          <a:chOff x="0" y="0"/>
+          <a:chExt cx="0" cy="0"/>
+        </a:xfrm>
+      </p:grpSpPr>
+      <p:sp>
+        <p:nvSpPr>
+          <p:cNvPr id="2" name="Slide Image Placeholder 1"/>
+          <p:cNvSpPr>
+            <a:spLocks noGrp="1"/>
+          </p:cNvSpPr>
+          <p:nvPr>
+            <p:ph type="sldImg" idx="2"/>
+          </p:nvPr>
+        </p:nvSpPr>
+        <p:spPr/>
+      </p:sp>
+      <p:sp>
+        <p:nvSpPr>
+          <p:cNvPr id="3" name="Notes Placeholder 2"/>
+          <p:cNvSpPr>
+            <a:spLocks noGrp="1"/>
+          </p:cNvSpPr>
+          <p:nvPr>
+            <p:ph type="body" idx="3" sz="quarter"/>
+          </p:nvPr>
+        </p:nvSpPr>
+        <p:spPr/>
+        <p:txBody>
+          <a:bodyPr/>
+          <a:lstStyle/>
+          <a:p>
+            <a:r>
+              <a:t>VO: There is a deeper reason the Board matters. Redesigning how government serves citizens needs the business side and the IT side to decide together — and they need a regular place to do it. The Board is that place. The repository gives them the shared picture; the metamodel gives them shared words; the Board gives them the shared rhythm — a standing forum where, four times a year and whenever it is urgent, business and IT sit down and decide together. That standing rhythm is part of what an EA provides that no single project ever can.</a:t>
+            </a:r>
+          </a:p>
+        </p:txBody>
+      </p:sp>
+      <p:sp>
+        <p:nvSpPr>
+          <p:cNvPr id="4" name="Slide Number Placeholder 3"/>
+          <p:cNvSpPr>
+            <a:spLocks noGrp="1"/>
+          </p:cNvSpPr>
+          <p:nvPr>
+            <p:ph type="sldNum" idx="5" sz="quarter"/>
+          </p:nvPr>
+        </p:nvSpPr>
+        <p:spPr/>
+      </p:sp>
+    </p:spTree>
+  </p:cSld>
+  <p:clrMapOvr>
+    <a:masterClrMapping/>
+  </p:clrMapOvr>
+</p:notes>
+</file>
+
+<file path=ppt/notesSlides/notesSlide36.xml><?xml version="1.0" encoding="utf-8"?>
+<p:notes xmlns:a="http://schemas.openxmlformats.org/drawingml/2006/main" xmlns:p="http://schemas.openxmlformats.org/presentationml/2006/main" xmlns:r="http://schemas.openxmlformats.org/officeDocument/2006/relationships">
+  <p:cSld>
+    <p:spTree>
+      <p:nvGrpSpPr>
+        <p:cNvPr id="1" name=""/>
+        <p:cNvGrpSpPr/>
+        <p:nvPr/>
+      </p:nvGrpSpPr>
+      <p:grpSpPr>
+        <a:xfrm>
+          <a:off x="0" y="0"/>
+          <a:ext cx="0" cy="0"/>
+          <a:chOff x="0" y="0"/>
+          <a:chExt cx="0" cy="0"/>
+        </a:xfrm>
+      </p:grpSpPr>
+      <p:sp>
+        <p:nvSpPr>
+          <p:cNvPr id="2" name="Slide Image Placeholder 1"/>
+          <p:cNvSpPr>
+            <a:spLocks noGrp="1"/>
+          </p:cNvSpPr>
+          <p:nvPr>
+            <p:ph type="sldImg" idx="2"/>
+          </p:nvPr>
+        </p:nvSpPr>
+        <p:spPr/>
+      </p:sp>
+      <p:sp>
+        <p:nvSpPr>
+          <p:cNvPr id="3" name="Notes Placeholder 2"/>
+          <p:cNvSpPr>
+            <a:spLocks noGrp="1"/>
+          </p:cNvSpPr>
+          <p:nvPr>
+            <p:ph type="body" idx="3" sz="quarter"/>
+          </p:nvPr>
+        </p:nvSpPr>
+        <p:spPr/>
+        <p:txBody>
+          <a:bodyPr/>
+          <a:lstStyle/>
+          <a:p>
+            <a:r>
+              <a:t>PRACTICE BOX (on-screen only — never read it, never paraphrase it, never point at it). It replaces the narrated handoff: this video ends on the recap and the Sources slide.</a:t>
+            </a:r>
+          </a:p>
+          <a:p/>
+          <a:p>
+            <a:r>
+              <a:t>VO: Stand up a Board that can say no: binding, not advisory, chaired by someone senior enough that the no sticks, made of the people whose systems are affected, on a rhythm that governs without blocking.</a:t>
+            </a:r>
+          </a:p>
+        </p:txBody>
+      </p:sp>
+      <p:sp>
+        <p:nvSpPr>
+          <p:cNvPr id="4" name="Slide Number Placeholder 3"/>
+          <p:cNvSpPr>
+            <a:spLocks noGrp="1"/>
+          </p:cNvSpPr>
+          <p:nvPr>
+            <p:ph type="sldNum" idx="5" sz="quarter"/>
+          </p:nvPr>
+        </p:nvSpPr>
+        <p:spPr/>
+      </p:sp>
+    </p:spTree>
+  </p:cSld>
+  <p:clrMapOvr>
+    <a:masterClrMapping/>
+  </p:clrMapOvr>
+</p:notes>
+</file>
+
+<file path=ppt/notesSlides/notesSlide37.xml><?xml version="1.0" encoding="utf-8"?>
 <p:notes xmlns:a="http://schemas.openxmlformats.org/drawingml/2006/main" xmlns:p="http://schemas.openxmlformats.org/presentationml/2006/main" xmlns:r="http://schemas.openxmlformats.org/officeDocument/2006/relationships">
   <p:cSld>
     <p:spTree>
@@ -11661,1391 +11661,6 @@
 </p:sldMaster>
 </file>
 
-<file path=ppt/slides/slide1.xml><?xml version="1.0" encoding="utf-8"?>
-<p:sld xmlns:a="http://schemas.openxmlformats.org/drawingml/2006/main" xmlns:r="http://schemas.openxmlformats.org/officeDocument/2006/relationships" xmlns:p="http://schemas.openxmlformats.org/presentationml/2006/main">
-  <p:cSld>
-    <p:spTree>
-      <p:nvGrpSpPr>
-        <p:cNvPr id="1" name=""/>
-        <p:cNvGrpSpPr/>
-        <p:nvPr/>
-      </p:nvGrpSpPr>
-      <p:grpSpPr>
-        <a:xfrm>
-          <a:off x="0" y="0"/>
-          <a:ext cx="0" cy="0"/>
-          <a:chOff x="0" y="0"/>
-          <a:chExt cx="0" cy="0"/>
-        </a:xfrm>
-      </p:grpSpPr>
-      <p:cxnSp>
-        <p:nvCxnSpPr>
-          <p:cNvPr id="11" name="Straight Connector 10">
-            <a:extLst>
-              <a:ext uri="{FF2B5EF4-FFF2-40B4-BE49-F238E27FC236}">
-                <a16:creationId xmlns:a16="http://schemas.microsoft.com/office/drawing/2014/main" id="{D9AD66F2-F7C0-4D03-9150-D28F17AC561D}"/>
-              </a:ext>
-            </a:extLst>
-          </p:cNvPr>
-          <p:cNvCxnSpPr>
-            <a:cxnSpLocks/>
-          </p:cNvCxnSpPr>
-          <p:nvPr/>
-        </p:nvCxnSpPr>
-        <p:spPr>
-          <a:xfrm>
-            <a:off x="373021" y="2198718"/>
-            <a:ext cx="6843567" cy="0"/>
-          </a:xfrm>
-          <a:prstGeom prst="line">
-            <a:avLst/>
-          </a:prstGeom>
-          <a:ln w="12700">
-            <a:solidFill>
-              <a:srgbClr val="009CD6"/>
-            </a:solidFill>
-          </a:ln>
-        </p:spPr>
-        <p:style>
-          <a:lnRef idx="1">
-            <a:schemeClr val="accent1"/>
-          </a:lnRef>
-          <a:fillRef idx="0">
-            <a:schemeClr val="accent1"/>
-          </a:fillRef>
-          <a:effectRef idx="0">
-            <a:schemeClr val="accent1"/>
-          </a:effectRef>
-          <a:fontRef idx="minor">
-            <a:schemeClr val="tx1"/>
-          </a:fontRef>
-        </p:style>
-      </p:cxnSp>
-      <p:sp>
-        <p:nvSpPr>
-          <p:cNvPr id="12" name="Title 9">
-            <a:extLst>
-              <a:ext uri="{FF2B5EF4-FFF2-40B4-BE49-F238E27FC236}">
-                <a16:creationId xmlns:a16="http://schemas.microsoft.com/office/drawing/2014/main" id="{EEB08032-CE0E-4986-AEDF-A41026C0E8B9}"/>
-              </a:ext>
-            </a:extLst>
-          </p:cNvPr>
-          <p:cNvSpPr txBox="1">
-            <a:spLocks/>
-          </p:cNvSpPr>
-          <p:nvPr/>
-        </p:nvSpPr>
-        <p:spPr>
-          <a:xfrm>
-            <a:off x="237734" y="702833"/>
-            <a:ext cx="6432007" cy="1218817"/>
-          </a:xfrm>
-          <a:prstGeom prst="rect">
-            <a:avLst/>
-          </a:prstGeom>
-        </p:spPr>
-        <p:txBody>
-          <a:bodyPr anchor="b">
-            <a:noAutofit/>
-          </a:bodyPr>
-          <a:lstStyle>
-            <a:lvl1pPr algn="l" defTabSz="914400" rtl="0" eaLnBrk="1" latinLnBrk="0" hangingPunct="1">
-              <a:lnSpc>
-                <a:spcPct val="90000"/>
-              </a:lnSpc>
-              <a:spcBef>
-                <a:spcPct val="0"/>
-              </a:spcBef>
-              <a:buNone/>
-              <a:defRPr sz="4000" kern="1200">
-                <a:solidFill>
-                  <a:schemeClr val="bg1"/>
-                </a:solidFill>
-                <a:latin typeface="Arial" panose="020B0604020202020204" pitchFamily="34" charset="0"/>
-                <a:ea typeface="+mj-ea"/>
-                <a:cs typeface="Arial" panose="020B0604020202020204" pitchFamily="34" charset="0"/>
-              </a:defRPr>
-            </a:lvl1pPr>
-          </a:lstStyle>
-          <a:p>
-            <a:r>
-              <a:rPr sz="2400" b="1" i="0">
-                <a:solidFill>
-                  <a:srgbClr val="1A1A1A"/>
-                </a:solidFill>
-                <a:latin typeface="Arial"/>
-              </a:rPr>
-              <a:t>3.4 — Stand up an EA Board that can actually say no</a:t>
-            </a:r>
-          </a:p>
-        </p:txBody>
-      </p:sp>
-      <p:pic>
-        <p:nvPicPr>
-          <p:cNvPr id="7" name="Picture 6">
-            <a:extLst>
-              <a:ext uri="{FF2B5EF4-FFF2-40B4-BE49-F238E27FC236}">
-                <a16:creationId xmlns:a16="http://schemas.microsoft.com/office/drawing/2014/main" id="{A2066351-C569-4C4C-A096-308777FCDC32}"/>
-              </a:ext>
-            </a:extLst>
-          </p:cNvPr>
-          <p:cNvPicPr>
-            <a:picLocks noChangeAspect="1"/>
-          </p:cNvPicPr>
-          <p:nvPr/>
-        </p:nvPicPr>
-        <p:blipFill>
-          <a:blip r:embed="rId2">
-            <a:extLst>
-              <a:ext uri="{28A0092B-C50C-407E-A947-70E740481C1C}">
-                <a14:useLocalDpi xmlns:a14="http://schemas.microsoft.com/office/drawing/2010/main" val="0"/>
-              </a:ext>
-            </a:extLst>
-          </a:blip>
-          <a:srcRect t="20219" b="14729"/>
-          <a:stretch>
-            <a:fillRect/>
-          </a:stretch>
-        </p:blipFill>
-        <p:spPr>
-          <a:xfrm>
-            <a:off x="0" y="5620871"/>
-            <a:ext cx="1323975" cy="1218816"/>
-          </a:xfrm>
-          <a:prstGeom prst="rect">
-            <a:avLst/>
-          </a:prstGeom>
-        </p:spPr>
-      </p:pic>
-      <p:sp>
-        <p:nvSpPr>
-          <p:cNvPr id="14" name="Title 9">
-            <a:extLst>
-              <a:ext uri="{FF2B5EF4-FFF2-40B4-BE49-F238E27FC236}">
-                <a16:creationId xmlns:a16="http://schemas.microsoft.com/office/drawing/2014/main" id="{B5087B80-3EE4-1881-0130-ED58CA625092}"/>
-              </a:ext>
-            </a:extLst>
-          </p:cNvPr>
-          <p:cNvSpPr txBox="1">
-            <a:spLocks/>
-          </p:cNvSpPr>
-          <p:nvPr/>
-        </p:nvSpPr>
-        <p:spPr>
-          <a:xfrm>
-            <a:off x="284452" y="2475786"/>
-            <a:ext cx="6382893" cy="953213"/>
-          </a:xfrm>
-          <a:prstGeom prst="rect">
-            <a:avLst/>
-          </a:prstGeom>
-        </p:spPr>
-        <p:txBody>
-          <a:bodyPr anchor="t">
-            <a:noAutofit/>
-          </a:bodyPr>
-          <a:lstStyle>
-            <a:lvl1pPr algn="l" defTabSz="914400" rtl="0" eaLnBrk="1" latinLnBrk="0" hangingPunct="1">
-              <a:lnSpc>
-                <a:spcPct val="90000"/>
-              </a:lnSpc>
-              <a:spcBef>
-                <a:spcPct val="0"/>
-              </a:spcBef>
-              <a:buNone/>
-              <a:defRPr sz="4000" kern="1200">
-                <a:solidFill>
-                  <a:schemeClr val="bg1"/>
-                </a:solidFill>
-                <a:latin typeface="Arial" panose="020B0604020202020204" pitchFamily="34" charset="0"/>
-                <a:ea typeface="+mj-ea"/>
-                <a:cs typeface="Arial" panose="020B0604020202020204" pitchFamily="34" charset="0"/>
-              </a:defRPr>
-            </a:lvl1pPr>
-          </a:lstStyle>
-          <a:p>
-            <a:pPr marL="0" marR="0" lvl="0" indent="0" rtl="0">
-              <a:spcBef>
-                <a:spcPts val="600"/>
-              </a:spcBef>
-              <a:spcAft>
-                <a:spcPts val="0"/>
-              </a:spcAft>
-              <a:buNone/>
-            </a:pPr>
-            <a:r>
-              <a:rPr sz="1300" b="1" i="0">
-                <a:solidFill>
-                  <a:srgbClr val="006E96"/>
-                </a:solidFill>
-                <a:latin typeface="Arial"/>
-              </a:rPr>
-              <a:t>KP1 · Government Enterprise Architecture · Module 3 · Video 3.4</a:t>
-            </a:r>
-          </a:p>
-          <a:p>
-            <a:r>
-              <a:rPr sz="1200" b="0" i="1">
-                <a:solidFill>
-                  <a:srgbClr val="595959"/>
-                </a:solidFill>
-                <a:latin typeface="Arial"/>
-              </a:rPr>
-              <a:t>An EA Board with binding authority — the right chair, the right members, a regular cadence, and a mandate that lets it say no — is what turns the architecture from a document into the place every digital decision passes through.</a:t>
-            </a:r>
-          </a:p>
-        </p:txBody>
-      </p:sp>
-      <p:sp>
-        <p:nvSpPr>
-          <p:cNvPr id="17" name="Title 9">
-            <a:extLst>
-              <a:ext uri="{FF2B5EF4-FFF2-40B4-BE49-F238E27FC236}">
-                <a16:creationId xmlns:a16="http://schemas.microsoft.com/office/drawing/2014/main" id="{5E8796F7-DD26-D250-5E97-B38B22298E72}"/>
-              </a:ext>
-            </a:extLst>
-          </p:cNvPr>
-          <p:cNvSpPr txBox="1">
-            <a:spLocks/>
-          </p:cNvSpPr>
-          <p:nvPr/>
-        </p:nvSpPr>
-        <p:spPr>
-          <a:xfrm>
-            <a:off x="284452" y="4363897"/>
-            <a:ext cx="6382893" cy="953213"/>
-          </a:xfrm>
-          <a:prstGeom prst="rect">
-            <a:avLst/>
-          </a:prstGeom>
-        </p:spPr>
-        <p:txBody>
-          <a:bodyPr anchor="t">
-            <a:noAutofit/>
-          </a:bodyPr>
-          <a:lstStyle>
-            <a:lvl1pPr algn="l" defTabSz="914400" rtl="0" eaLnBrk="1" latinLnBrk="0" hangingPunct="1">
-              <a:lnSpc>
-                <a:spcPct val="90000"/>
-              </a:lnSpc>
-              <a:spcBef>
-                <a:spcPct val="0"/>
-              </a:spcBef>
-              <a:buNone/>
-              <a:defRPr sz="4000" kern="1200">
-                <a:solidFill>
-                  <a:schemeClr val="bg1"/>
-                </a:solidFill>
-                <a:latin typeface="Arial" panose="020B0604020202020204" pitchFamily="34" charset="0"/>
-                <a:ea typeface="+mj-ea"/>
-                <a:cs typeface="Arial" panose="020B0604020202020204" pitchFamily="34" charset="0"/>
-              </a:defRPr>
-            </a:lvl1pPr>
-          </a:lstStyle>
-          <a:p>
-            <a:pPr marL="0" marR="0" lvl="0" indent="0" rtl="0">
-              <a:spcBef>
-                <a:spcPts val="600"/>
-              </a:spcBef>
-              <a:spcAft>
-                <a:spcPts val="1200"/>
-              </a:spcAft>
-              <a:buNone/>
-            </a:pPr>
-            <a:r>
-              <a:rPr sz="1400" b="1" i="0">
-                <a:solidFill>
-                  <a:srgbClr val="1A1A1A"/>
-                </a:solidFill>
-                <a:latin typeface="Arial"/>
-              </a:rPr>
-              <a:t>Target audience: </a:t>
-            </a:r>
-            <a:r>
-              <a:rPr sz="1400" b="0" i="0">
-                <a:solidFill>
-                  <a:srgbClr val="1A1A1A"/>
-                </a:solidFill>
-                <a:latin typeface="Arial"/>
-              </a:rPr>
-              <a:t>Chief architect · senior architect · sector ICT lead</a:t>
-            </a:r>
-          </a:p>
-        </p:txBody>
-      </p:sp>
-      <p:sp>
-        <p:nvSpPr>
-          <p:cNvPr id="18" name="Rectangle 17"/>
-          <p:cNvSpPr/>
-          <p:nvPr/>
-        </p:nvSpPr>
-        <p:spPr>
-          <a:xfrm>
-            <a:off x="7022592" y="0"/>
-            <a:ext cx="5169103" cy="6858000"/>
-          </a:xfrm>
-          <a:prstGeom prst="rect">
-            <a:avLst/>
-          </a:prstGeom>
-          <a:solidFill>
-            <a:srgbClr val="009CD6"/>
-          </a:solidFill>
-          <a:ln>
-            <a:noFill/>
-          </a:ln>
-          <a:effectLst/>
-        </p:spPr>
-        <p:style>
-          <a:lnRef idx="1">
-            <a:schemeClr val="accent1"/>
-          </a:lnRef>
-          <a:fillRef idx="3">
-            <a:schemeClr val="accent1"/>
-          </a:fillRef>
-          <a:effectRef idx="2">
-            <a:schemeClr val="accent1"/>
-          </a:effectRef>
-          <a:fontRef idx="minor">
-            <a:schemeClr val="lt1"/>
-          </a:fontRef>
-        </p:style>
-        <p:txBody>
-          <a:bodyPr rtlCol="0" anchor="ctr"/>
-          <a:lstStyle/>
-          <a:p>
-            <a:pPr algn="ctr"/>
-          </a:p>
-        </p:txBody>
-      </p:sp>
-      <p:sp>
-        <p:nvSpPr>
-          <p:cNvPr id="19" name="TextBox 18"/>
-          <p:cNvSpPr txBox="1"/>
-          <p:nvPr/>
-        </p:nvSpPr>
-        <p:spPr>
-          <a:xfrm>
-            <a:off x="7452360" y="457200"/>
-            <a:ext cx="4297680" cy="457200"/>
-          </a:xfrm>
-          <a:prstGeom prst="rect">
-            <a:avLst/>
-          </a:prstGeom>
-          <a:noFill/>
-        </p:spPr>
-        <p:txBody>
-          <a:bodyPr wrap="square">
-            <a:spAutoFit/>
-          </a:bodyPr>
-          <a:lstStyle/>
-          <a:p>
-            <a:r>
-              <a:rPr sz="1100" b="1" i="0">
-                <a:solidFill>
-                  <a:srgbClr val="E5F5FB"/>
-                </a:solidFill>
-                <a:latin typeface="Arial"/>
-              </a:rPr>
-              <a:t>THE PRACTICE THIS MODULE STANDS UP</a:t>
-            </a:r>
-          </a:p>
-        </p:txBody>
-      </p:sp>
-      <p:sp>
-        <p:nvSpPr>
-          <p:cNvPr id="20" name="Rounded Rectangle 19"/>
-          <p:cNvSpPr/>
-          <p:nvPr/>
-        </p:nvSpPr>
-        <p:spPr>
-          <a:xfrm>
-            <a:off x="7452360" y="960120"/>
-            <a:ext cx="3840480" cy="658368"/>
-          </a:xfrm>
-          <a:prstGeom prst="roundRect">
-            <a:avLst>
-              <a:gd name="adj" fmla="val 14000"/>
-            </a:avLst>
-          </a:prstGeom>
-          <a:solidFill>
-            <a:srgbClr val="FFFFFF"/>
-          </a:solidFill>
-          <a:ln>
-            <a:noFill/>
-          </a:ln>
-          <a:effectLst/>
-        </p:spPr>
-        <p:style>
-          <a:lnRef idx="1">
-            <a:schemeClr val="accent1"/>
-          </a:lnRef>
-          <a:fillRef idx="3">
-            <a:schemeClr val="accent1"/>
-          </a:fillRef>
-          <a:effectRef idx="2">
-            <a:schemeClr val="accent1"/>
-          </a:effectRef>
-          <a:fontRef idx="minor">
-            <a:schemeClr val="lt1"/>
-          </a:fontRef>
-        </p:style>
-        <p:txBody>
-          <a:bodyPr rtlCol="0" anchor="ctr" lIns="164592" wrap="square"/>
-          <a:lstStyle/>
-          <a:p>
-            <a:pPr algn="ctr"/>
-            <a:r>
-              <a:rPr sz="1500" b="1" i="0">
-                <a:solidFill>
-                  <a:srgbClr val="1A1A1A"/>
-                </a:solidFill>
-                <a:latin typeface="Arial"/>
-              </a:rPr>
-              <a:t>Repository — where the architecture lives</a:t>
-            </a:r>
-          </a:p>
-        </p:txBody>
-      </p:sp>
-      <p:sp>
-        <p:nvSpPr>
-          <p:cNvPr id="21" name="Rounded Rectangle 20"/>
-          <p:cNvSpPr/>
-          <p:nvPr/>
-        </p:nvSpPr>
-        <p:spPr>
-          <a:xfrm>
-            <a:off x="7452360" y="1892808"/>
-            <a:ext cx="3840480" cy="658368"/>
-          </a:xfrm>
-          <a:prstGeom prst="roundRect">
-            <a:avLst>
-              <a:gd name="adj" fmla="val 14000"/>
-            </a:avLst>
-          </a:prstGeom>
-          <a:solidFill>
-            <a:srgbClr val="FFFFFF"/>
-          </a:solidFill>
-          <a:ln>
-            <a:noFill/>
-          </a:ln>
-          <a:effectLst/>
-        </p:spPr>
-        <p:style>
-          <a:lnRef idx="1">
-            <a:schemeClr val="accent1"/>
-          </a:lnRef>
-          <a:fillRef idx="3">
-            <a:schemeClr val="accent1"/>
-          </a:fillRef>
-          <a:effectRef idx="2">
-            <a:schemeClr val="accent1"/>
-          </a:effectRef>
-          <a:fontRef idx="minor">
-            <a:schemeClr val="lt1"/>
-          </a:fontRef>
-        </p:style>
-        <p:txBody>
-          <a:bodyPr rtlCol="0" anchor="ctr" lIns="164592" wrap="square"/>
-          <a:lstStyle/>
-          <a:p>
-            <a:pPr algn="ctr"/>
-            <a:r>
-              <a:rPr sz="1500" b="1" i="0">
-                <a:solidFill>
-                  <a:srgbClr val="1A1A1A"/>
-                </a:solidFill>
-                <a:latin typeface="Arial"/>
-              </a:rPr>
-              <a:t>Tooling — chosen without lock-in</a:t>
-            </a:r>
-          </a:p>
-        </p:txBody>
-      </p:sp>
-      <p:sp>
-        <p:nvSpPr>
-          <p:cNvPr id="22" name="Rounded Rectangle 21"/>
-          <p:cNvSpPr/>
-          <p:nvPr/>
-        </p:nvSpPr>
-        <p:spPr>
-          <a:xfrm>
-            <a:off x="7452360" y="2825496"/>
-            <a:ext cx="3840480" cy="658368"/>
-          </a:xfrm>
-          <a:prstGeom prst="roundRect">
-            <a:avLst>
-              <a:gd name="adj" fmla="val 14000"/>
-            </a:avLst>
-          </a:prstGeom>
-          <a:solidFill>
-            <a:srgbClr val="FFFFFF"/>
-          </a:solidFill>
-          <a:ln>
-            <a:noFill/>
-          </a:ln>
-          <a:effectLst/>
-        </p:spPr>
-        <p:style>
-          <a:lnRef idx="1">
-            <a:schemeClr val="accent1"/>
-          </a:lnRef>
-          <a:fillRef idx="3">
-            <a:schemeClr val="accent1"/>
-          </a:fillRef>
-          <a:effectRef idx="2">
-            <a:schemeClr val="accent1"/>
-          </a:effectRef>
-          <a:fontRef idx="minor">
-            <a:schemeClr val="lt1"/>
-          </a:fontRef>
-        </p:style>
-        <p:txBody>
-          <a:bodyPr rtlCol="0" anchor="ctr" lIns="164592" wrap="square"/>
-          <a:lstStyle/>
-          <a:p>
-            <a:pPr algn="ctr"/>
-            <a:r>
-              <a:rPr sz="1500" b="1" i="0">
-                <a:solidFill>
-                  <a:srgbClr val="1A1A1A"/>
-                </a:solidFill>
-                <a:latin typeface="Arial"/>
-              </a:rPr>
-              <a:t>Governance — a Board and a gate</a:t>
-            </a:r>
-          </a:p>
-        </p:txBody>
-      </p:sp>
-      <p:sp>
-        <p:nvSpPr>
-          <p:cNvPr id="23" name="Rounded Rectangle 22"/>
-          <p:cNvSpPr/>
-          <p:nvPr/>
-        </p:nvSpPr>
-        <p:spPr>
-          <a:xfrm>
-            <a:off x="7452360" y="3758184"/>
-            <a:ext cx="3840480" cy="658368"/>
-          </a:xfrm>
-          <a:prstGeom prst="roundRect">
-            <a:avLst>
-              <a:gd name="adj" fmla="val 14000"/>
-            </a:avLst>
-          </a:prstGeom>
-          <a:solidFill>
-            <a:srgbClr val="006E96"/>
-          </a:solidFill>
-          <a:ln>
-            <a:noFill/>
-          </a:ln>
-          <a:effectLst/>
-        </p:spPr>
-        <p:style>
-          <a:lnRef idx="1">
-            <a:schemeClr val="accent1"/>
-          </a:lnRef>
-          <a:fillRef idx="3">
-            <a:schemeClr val="accent1"/>
-          </a:fillRef>
-          <a:effectRef idx="2">
-            <a:schemeClr val="accent1"/>
-          </a:effectRef>
-          <a:fontRef idx="minor">
-            <a:schemeClr val="lt1"/>
-          </a:fontRef>
-        </p:style>
-        <p:txBody>
-          <a:bodyPr rtlCol="0" anchor="ctr" lIns="164592" wrap="square"/>
-          <a:lstStyle/>
-          <a:p>
-            <a:pPr algn="ctr"/>
-            <a:r>
-              <a:rPr sz="1500" b="1" i="0">
-                <a:solidFill>
-                  <a:srgbClr val="FFFFFF"/>
-                </a:solidFill>
-                <a:latin typeface="Arial"/>
-              </a:rPr>
-              <a:t>Sustainment — alive past year two</a:t>
-            </a:r>
-          </a:p>
-        </p:txBody>
-      </p:sp>
-      <p:sp>
-        <p:nvSpPr>
-          <p:cNvPr id="24" name="TextBox 23"/>
-          <p:cNvSpPr txBox="1"/>
-          <p:nvPr/>
-        </p:nvSpPr>
-        <p:spPr>
-          <a:xfrm>
-            <a:off x="7452360" y="5806440"/>
-            <a:ext cx="4297680" cy="731520"/>
-          </a:xfrm>
-          <a:prstGeom prst="rect">
-            <a:avLst/>
-          </a:prstGeom>
-          <a:noFill/>
-        </p:spPr>
-        <p:txBody>
-          <a:bodyPr wrap="square">
-            <a:spAutoFit/>
-          </a:bodyPr>
-          <a:lstStyle/>
-          <a:p>
-            <a:r>
-              <a:rPr sz="1200" b="0" i="0">
-                <a:solidFill>
-                  <a:srgbClr val="FFFFFF"/>
-                </a:solidFill>
-                <a:latin typeface="Arial"/>
-              </a:rPr>
-              <a:t>5 gate questions · 4 health metrics · 4 ways a practice fades</a:t>
-            </a:r>
-          </a:p>
-        </p:txBody>
-      </p:sp>
-    </p:spTree>
-    <p:extLst>
-      <p:ext uri="{BB962C8B-B14F-4D97-AF65-F5344CB8AC3E}">
-        <p14:creationId xmlns:p14="http://schemas.microsoft.com/office/powerpoint/2010/main" val="1196800265"/>
-      </p:ext>
-    </p:extLst>
-  </p:cSld>
-  <p:clrMapOvr>
-    <a:masterClrMapping/>
-  </p:clrMapOvr>
-</p:sld>
-</file>
-
-<file path=ppt/slides/slide26.xml><?xml version="1.0" encoding="utf-8"?>
-<p:sld xmlns:a="http://schemas.openxmlformats.org/drawingml/2006/main" xmlns:p="http://schemas.openxmlformats.org/presentationml/2006/main" xmlns:r="http://schemas.openxmlformats.org/officeDocument/2006/relationships">
-  <p:cSld>
-    <p:spTree>
-      <p:nvGrpSpPr>
-        <p:cNvPr id="1" name=""/>
-        <p:cNvGrpSpPr/>
-        <p:nvPr/>
-      </p:nvGrpSpPr>
-      <p:grpSpPr/>
-      <p:sp>
-        <p:nvSpPr>
-          <p:cNvPr id="2" name="TextBox 1"/>
-          <p:cNvSpPr txBox="1"/>
-          <p:nvPr/>
-        </p:nvSpPr>
-        <p:spPr>
-          <a:xfrm>
-            <a:off x="822960" y="822960"/>
-            <a:ext cx="7315200" cy="457200"/>
-          </a:xfrm>
-          <a:prstGeom prst="rect">
-            <a:avLst/>
-          </a:prstGeom>
-          <a:noFill/>
-        </p:spPr>
-        <p:txBody>
-          <a:bodyPr wrap="square">
-            <a:spAutoFit/>
-          </a:bodyPr>
-          <a:lstStyle/>
-          <a:p>
-            <a:r>
-              <a:rPr sz="1200" b="1" i="0">
-                <a:solidFill>
-                  <a:srgbClr val="595959"/>
-                </a:solidFill>
-                <a:latin typeface="Arial"/>
-              </a:rPr>
-              <a:t>KP1 · MODULE 3 · VIDEO 3.4</a:t>
-            </a:r>
-          </a:p>
-        </p:txBody>
-      </p:sp>
-      <p:sp>
-        <p:nvSpPr>
-          <p:cNvPr id="3" name="TextBox 2"/>
-          <p:cNvSpPr txBox="1"/>
-          <p:nvPr/>
-        </p:nvSpPr>
-        <p:spPr>
-          <a:xfrm>
-            <a:off x="822960" y="1828800"/>
-            <a:ext cx="2011680" cy="1097280"/>
-          </a:xfrm>
-          <a:prstGeom prst="rect">
-            <a:avLst/>
-          </a:prstGeom>
-          <a:noFill/>
-        </p:spPr>
-        <p:txBody>
-          <a:bodyPr wrap="square">
-            <a:spAutoFit/>
-          </a:bodyPr>
-          <a:lstStyle/>
-          <a:p>
-            <a:r>
-              <a:rPr sz="6000" b="1" i="0">
-                <a:solidFill>
-                  <a:srgbClr val="009CD6"/>
-                </a:solidFill>
-                <a:latin typeface="Arial"/>
-              </a:rPr>
-              <a:t>3.4</a:t>
-            </a:r>
-          </a:p>
-        </p:txBody>
-      </p:sp>
-      <p:sp>
-        <p:nvSpPr>
-          <p:cNvPr id="4" name="TextBox 3"/>
-          <p:cNvSpPr txBox="1"/>
-          <p:nvPr/>
-        </p:nvSpPr>
-        <p:spPr>
-          <a:xfrm>
-            <a:off x="822960" y="2880360"/>
-            <a:ext cx="9601200" cy="1371600"/>
-          </a:xfrm>
-          <a:prstGeom prst="rect">
-            <a:avLst/>
-          </a:prstGeom>
-          <a:noFill/>
-        </p:spPr>
-        <p:txBody>
-          <a:bodyPr wrap="square">
-            <a:spAutoFit/>
-          </a:bodyPr>
-          <a:lstStyle/>
-          <a:p>
-            <a:r>
-              <a:rPr sz="3400" b="1" i="0">
-                <a:solidFill>
-                  <a:srgbClr val="1A1A1A"/>
-                </a:solidFill>
-                <a:latin typeface="Arial"/>
-              </a:rPr>
-              <a:t>Stand up an EA Board that can actually say no</a:t>
-            </a:r>
-          </a:p>
-        </p:txBody>
-      </p:sp>
-      <p:sp>
-        <p:nvSpPr>
-          <p:cNvPr id="5" name="TextBox 4"/>
-          <p:cNvSpPr txBox="1"/>
-          <p:nvPr/>
-        </p:nvSpPr>
-        <p:spPr>
-          <a:xfrm>
-            <a:off x="822960" y="4343400"/>
-            <a:ext cx="9875520" cy="1554480"/>
-          </a:xfrm>
-          <a:prstGeom prst="rect">
-            <a:avLst/>
-          </a:prstGeom>
-          <a:noFill/>
-        </p:spPr>
-        <p:txBody>
-          <a:bodyPr wrap="square">
-            <a:spAutoFit/>
-          </a:bodyPr>
-          <a:lstStyle/>
-          <a:p>
-            <a:r>
-              <a:rPr sz="1700" b="0" i="1">
-                <a:solidFill>
-                  <a:srgbClr val="595959"/>
-                </a:solidFill>
-                <a:latin typeface="Arial"/>
-              </a:rPr>
-              <a:t>An EA Board with binding authority — the right chair, the right members, a regular cadence, and a mandate that lets it say no — is what turns the architecture from a document into the place every digital decision passes through.</a:t>
-            </a:r>
-          </a:p>
-        </p:txBody>
-      </p:sp>
-      <p:sp>
-        <p:nvSpPr>
-          <p:cNvPr id="6" name="TextBox 5"/>
-          <p:cNvSpPr txBox="1"/>
-          <p:nvPr/>
-        </p:nvSpPr>
-        <p:spPr>
-          <a:xfrm>
-            <a:off x="822960" y="5989320"/>
-            <a:ext cx="7315200" cy="365760"/>
-          </a:xfrm>
-          <a:prstGeom prst="rect">
-            <a:avLst/>
-          </a:prstGeom>
-          <a:noFill/>
-        </p:spPr>
-        <p:txBody>
-          <a:bodyPr wrap="square">
-            <a:spAutoFit/>
-          </a:bodyPr>
-          <a:lstStyle/>
-          <a:p>
-            <a:r>
-              <a:rPr sz="1200" b="0" i="0">
-                <a:solidFill>
-                  <a:srgbClr val="595959"/>
-                </a:solidFill>
-                <a:latin typeface="Arial"/>
-              </a:rPr>
-              <a:t>~4 minutes · standalone video · voice-over on text slides</a:t>
-            </a:r>
-          </a:p>
-        </p:txBody>
-      </p:sp>
-    </p:spTree>
-  </p:cSld>
-  <p:clrMapOvr>
-    <a:masterClrMapping/>
-  </p:clrMapOvr>
-</p:sld>
-</file>
-
-<file path=ppt/slides/slide27.xml><?xml version="1.0" encoding="utf-8"?>
-<p:sld xmlns:a="http://schemas.openxmlformats.org/drawingml/2006/main" xmlns:p="http://schemas.openxmlformats.org/presentationml/2006/main" xmlns:r="http://schemas.openxmlformats.org/officeDocument/2006/relationships">
-  <p:cSld>
-    <p:spTree>
-      <p:nvGrpSpPr>
-        <p:cNvPr id="1" name=""/>
-        <p:cNvGrpSpPr/>
-        <p:nvPr/>
-      </p:nvGrpSpPr>
-      <p:grpSpPr/>
-      <p:sp>
-        <p:nvSpPr>
-          <p:cNvPr id="2" name="Rectangle 1"/>
-          <p:cNvSpPr/>
-          <p:nvPr/>
-        </p:nvSpPr>
-        <p:spPr>
-          <a:xfrm>
-            <a:off x="457200" y="384048"/>
-            <a:ext cx="45720" cy="256032"/>
-          </a:xfrm>
-          <a:prstGeom prst="rect">
-            <a:avLst/>
-          </a:prstGeom>
-          <a:solidFill>
-            <a:srgbClr val="009CD6"/>
-          </a:solidFill>
-          <a:ln>
-            <a:noFill/>
-          </a:ln>
-          <a:effectLst/>
-        </p:spPr>
-        <p:style>
-          <a:lnRef idx="1">
-            <a:schemeClr val="accent1"/>
-          </a:lnRef>
-          <a:fillRef idx="3">
-            <a:schemeClr val="accent1"/>
-          </a:fillRef>
-          <a:effectRef idx="2">
-            <a:schemeClr val="accent1"/>
-          </a:effectRef>
-          <a:fontRef idx="minor">
-            <a:schemeClr val="lt1"/>
-          </a:fontRef>
-        </p:style>
-        <p:txBody>
-          <a:bodyPr rtlCol="0" anchor="ctr"/>
-          <a:lstStyle/>
-          <a:p>
-            <a:pPr algn="ctr"/>
-          </a:p>
-        </p:txBody>
-      </p:sp>
-      <p:sp>
-        <p:nvSpPr>
-          <p:cNvPr id="3" name="TextBox 2"/>
-          <p:cNvSpPr txBox="1"/>
-          <p:nvPr/>
-        </p:nvSpPr>
-        <p:spPr>
-          <a:xfrm>
-            <a:off x="621792" y="274320"/>
-            <a:ext cx="11247120" cy="914400"/>
-          </a:xfrm>
-          <a:prstGeom prst="rect">
-            <a:avLst/>
-          </a:prstGeom>
-          <a:noFill/>
-        </p:spPr>
-        <p:txBody>
-          <a:bodyPr wrap="square">
-            <a:spAutoFit/>
-          </a:bodyPr>
-          <a:lstStyle/>
-          <a:p>
-            <a:r>
-              <a:rPr sz="2800" b="1" i="0">
-                <a:solidFill>
-                  <a:srgbClr val="1A1A1A"/>
-                </a:solidFill>
-                <a:latin typeface="Arial"/>
-              </a:rPr>
-              <a:t>An advisory board produces minutes; a binding board produces decisions</a:t>
-            </a:r>
-          </a:p>
-        </p:txBody>
-      </p:sp>
-      <p:sp>
-        <p:nvSpPr>
-          <p:cNvPr id="4" name="TextBox 3"/>
-          <p:cNvSpPr txBox="1"/>
-          <p:nvPr/>
-        </p:nvSpPr>
-        <p:spPr>
-          <a:xfrm>
-            <a:off x="658368" y="1600200"/>
-            <a:ext cx="10881360" cy="2651760"/>
-          </a:xfrm>
-          <a:prstGeom prst="rect">
-            <a:avLst/>
-          </a:prstGeom>
-          <a:noFill/>
-        </p:spPr>
-        <p:txBody>
-          <a:bodyPr wrap="square">
-            <a:spAutoFit/>
-          </a:bodyPr>
-          <a:lstStyle/>
-          <a:p>
-            <a:pPr>
-              <a:spcAft>
-                <a:spcPts val="1200"/>
-              </a:spcAft>
-            </a:pPr>
-            <a:r>
-              <a:rPr sz="2000" b="0" i="0">
-                <a:solidFill>
-                  <a:srgbClr val="1A1A1A"/>
-                </a:solidFill>
-                <a:latin typeface="Arial"/>
-              </a:rPr>
-              <a:t>An advisory board looks at a project, offers an opinion, and the project does whatever it was going to do. That is governance theatre.</a:t>
-            </a:r>
-          </a:p>
-          <a:p>
-            <a:pPr>
-              <a:spcAft>
-                <a:spcPts val="1200"/>
-              </a:spcAft>
-            </a:pPr>
-            <a:r>
-              <a:rPr sz="2000" b="0" i="0">
-                <a:solidFill>
-                  <a:srgbClr val="1A1A1A"/>
-                </a:solidFill>
-                <a:latin typeface="Arial"/>
-              </a:rPr>
-              <a:t>A binding board’s rulings are a condition of proceeding: a project told to consume the shared identity platform does so, or it does not get funded.</a:t>
-            </a:r>
-          </a:p>
-        </p:txBody>
-      </p:sp>
-      <p:sp>
-        <p:nvSpPr>
-          <p:cNvPr id="5" name="Rounded Rectangle 4"/>
-          <p:cNvSpPr/>
-          <p:nvPr/>
-        </p:nvSpPr>
-        <p:spPr>
-          <a:xfrm>
-            <a:off x="658368" y="4434840"/>
-            <a:ext cx="10881360" cy="1325880"/>
-          </a:xfrm>
-          <a:prstGeom prst="roundRect">
-            <a:avLst>
-              <a:gd name="adj" fmla="val 4500"/>
-            </a:avLst>
-          </a:prstGeom>
-          <a:solidFill>
-            <a:srgbClr val="E5F5FB"/>
-          </a:solidFill>
-          <a:ln>
-            <a:noFill/>
-          </a:ln>
-          <a:effectLst/>
-        </p:spPr>
-        <p:style>
-          <a:lnRef idx="1">
-            <a:schemeClr val="accent1"/>
-          </a:lnRef>
-          <a:fillRef idx="3">
-            <a:schemeClr val="accent1"/>
-          </a:fillRef>
-          <a:effectRef idx="2">
-            <a:schemeClr val="accent1"/>
-          </a:effectRef>
-          <a:fontRef idx="minor">
-            <a:schemeClr val="lt1"/>
-          </a:fontRef>
-        </p:style>
-        <p:txBody>
-          <a:bodyPr rtlCol="0" anchor="ctr"/>
-          <a:lstStyle/>
-          <a:p>
-            <a:pPr algn="ctr"/>
-          </a:p>
-        </p:txBody>
-      </p:sp>
-      <p:sp>
-        <p:nvSpPr>
-          <p:cNvPr id="6" name="TextBox 5"/>
-          <p:cNvSpPr txBox="1"/>
-          <p:nvPr/>
-        </p:nvSpPr>
-        <p:spPr>
-          <a:xfrm>
-            <a:off x="859536" y="4626864"/>
-            <a:ext cx="10479024" cy="1051560"/>
-          </a:xfrm>
-          <a:prstGeom prst="rect">
-            <a:avLst/>
-          </a:prstGeom>
-          <a:noFill/>
-        </p:spPr>
-        <p:txBody>
-          <a:bodyPr wrap="square">
-            <a:spAutoFit/>
-          </a:bodyPr>
-          <a:lstStyle/>
-          <a:p>
-            <a:pPr>
-              <a:spcAft>
-                <a:spcPts val="700"/>
-              </a:spcAft>
-            </a:pPr>
-            <a:r>
-              <a:rPr sz="2300" b="1" i="0">
-                <a:solidFill>
-                  <a:srgbClr val="006E96"/>
-                </a:solidFill>
-                <a:latin typeface="Arial"/>
-              </a:rPr>
-              <a:t>Without binding authority you have a discussion group, not a governance board.</a:t>
-            </a:r>
-          </a:p>
-        </p:txBody>
-      </p:sp>
-      <p:sp>
-        <p:nvSpPr>
-          <p:cNvPr id="7" name="TextBox 6"/>
-          <p:cNvSpPr txBox="1"/>
-          <p:nvPr/>
-        </p:nvSpPr>
-        <p:spPr>
-          <a:xfrm>
-            <a:off x="457200" y="6473952"/>
-            <a:ext cx="7772400" cy="292608"/>
-          </a:xfrm>
-          <a:prstGeom prst="rect">
-            <a:avLst/>
-          </a:prstGeom>
-          <a:noFill/>
-        </p:spPr>
-        <p:txBody>
-          <a:bodyPr wrap="square">
-            <a:spAutoFit/>
-          </a:bodyPr>
-          <a:lstStyle/>
-          <a:p>
-            <a:r>
-              <a:rPr sz="900" b="0" i="0">
-                <a:solidFill>
-                  <a:srgbClr val="595959"/>
-                </a:solidFill>
-                <a:latin typeface="Arial"/>
-              </a:rPr>
-              <a:t>3.4 · Stand up an EA Board that can actually say no</a:t>
-            </a:r>
-          </a:p>
-        </p:txBody>
-      </p:sp>
-    </p:spTree>
-  </p:cSld>
-  <p:clrMapOvr>
-    <a:masterClrMapping/>
-  </p:clrMapOvr>
-</p:sld>
-</file>
-
-<file path=ppt/slides/slide28.xml><?xml version="1.0" encoding="utf-8"?>
-<p:sld xmlns:a="http://schemas.openxmlformats.org/drawingml/2006/main" xmlns:p="http://schemas.openxmlformats.org/presentationml/2006/main" xmlns:r="http://schemas.openxmlformats.org/officeDocument/2006/relationships">
-  <p:cSld>
-    <p:spTree>
-      <p:nvGrpSpPr>
-        <p:cNvPr id="1" name=""/>
-        <p:cNvGrpSpPr/>
-        <p:nvPr/>
-      </p:nvGrpSpPr>
-      <p:grpSpPr/>
-      <p:sp>
-        <p:nvSpPr>
-          <p:cNvPr id="2" name="Rectangle 1"/>
-          <p:cNvSpPr/>
-          <p:nvPr/>
-        </p:nvSpPr>
-        <p:spPr>
-          <a:xfrm>
-            <a:off x="457200" y="384048"/>
-            <a:ext cx="45720" cy="256032"/>
-          </a:xfrm>
-          <a:prstGeom prst="rect">
-            <a:avLst/>
-          </a:prstGeom>
-          <a:solidFill>
-            <a:srgbClr val="009CD6"/>
-          </a:solidFill>
-          <a:ln>
-            <a:noFill/>
-          </a:ln>
-          <a:effectLst/>
-        </p:spPr>
-        <p:style>
-          <a:lnRef idx="1">
-            <a:schemeClr val="accent1"/>
-          </a:lnRef>
-          <a:fillRef idx="3">
-            <a:schemeClr val="accent1"/>
-          </a:fillRef>
-          <a:effectRef idx="2">
-            <a:schemeClr val="accent1"/>
-          </a:effectRef>
-          <a:fontRef idx="minor">
-            <a:schemeClr val="lt1"/>
-          </a:fontRef>
-        </p:style>
-        <p:txBody>
-          <a:bodyPr rtlCol="0" anchor="ctr"/>
-          <a:lstStyle/>
-          <a:p>
-            <a:pPr algn="ctr"/>
-          </a:p>
-        </p:txBody>
-      </p:sp>
-      <p:sp>
-        <p:nvSpPr>
-          <p:cNvPr id="3" name="TextBox 2"/>
-          <p:cNvSpPr txBox="1"/>
-          <p:nvPr/>
-        </p:nvSpPr>
-        <p:spPr>
-          <a:xfrm>
-            <a:off x="621792" y="274320"/>
-            <a:ext cx="11247120" cy="914400"/>
-          </a:xfrm>
-          <a:prstGeom prst="rect">
-            <a:avLst/>
-          </a:prstGeom>
-          <a:noFill/>
-        </p:spPr>
-        <p:txBody>
-          <a:bodyPr wrap="square">
-            <a:spAutoFit/>
-          </a:bodyPr>
-          <a:lstStyle/>
-          <a:p>
-            <a:r>
-              <a:rPr sz="2800" b="1" i="0">
-                <a:solidFill>
-                  <a:srgbClr val="1A1A1A"/>
-                </a:solidFill>
-                <a:latin typeface="Arial"/>
-              </a:rPr>
-              <a:t>The chair decides whether the no sticks</a:t>
-            </a:r>
-          </a:p>
-        </p:txBody>
-      </p:sp>
-      <p:sp>
-        <p:nvSpPr>
-          <p:cNvPr id="4" name="TextBox 3"/>
-          <p:cNvSpPr txBox="1"/>
-          <p:nvPr/>
-        </p:nvSpPr>
-        <p:spPr>
-          <a:xfrm>
-            <a:off x="658368" y="1600200"/>
-            <a:ext cx="10881360" cy="2651760"/>
-          </a:xfrm>
-          <a:prstGeom prst="rect">
-            <a:avLst/>
-          </a:prstGeom>
-          <a:noFill/>
-        </p:spPr>
-        <p:txBody>
-          <a:bodyPr wrap="square">
-            <a:spAutoFit/>
-          </a:bodyPr>
-          <a:lstStyle/>
-          <a:p>
-            <a:pPr>
-              <a:spcAft>
-                <a:spcPts val="1200"/>
-              </a:spcAft>
-            </a:pPr>
-            <a:r>
-              <a:rPr sz="2000" b="0" i="0">
-                <a:solidFill>
-                  <a:srgbClr val="1A1A1A"/>
-                </a:solidFill>
-                <a:latin typeface="Arial"/>
-              </a:rPr>
-              <a:t>Your Chief Digitalisation Officer or its equivalent — or, in a smaller government, the minister directly. Senior enough that when the Board declines a powerful ministry’s pet project, the decision holds.</a:t>
-            </a:r>
-          </a:p>
-          <a:p>
-            <a:pPr>
-              <a:spcAft>
-                <a:spcPts val="1200"/>
-              </a:spcAft>
-            </a:pPr>
-            <a:r>
-              <a:rPr sz="2000" b="0" i="0">
-                <a:solidFill>
-                  <a:srgbClr val="1A1A1A"/>
-                </a:solidFill>
-                <a:latin typeface="Arial"/>
-              </a:rPr>
-              <a:t>Note who does not chair it: you. You prepare the Board, you advise it, you bring the analysis.</a:t>
-            </a:r>
-          </a:p>
-        </p:txBody>
-      </p:sp>
-      <p:sp>
-        <p:nvSpPr>
-          <p:cNvPr id="5" name="Rounded Rectangle 4"/>
-          <p:cNvSpPr/>
-          <p:nvPr/>
-        </p:nvSpPr>
-        <p:spPr>
-          <a:xfrm>
-            <a:off x="658368" y="4434840"/>
-            <a:ext cx="10881360" cy="1325880"/>
-          </a:xfrm>
-          <a:prstGeom prst="roundRect">
-            <a:avLst>
-              <a:gd name="adj" fmla="val 4500"/>
-            </a:avLst>
-          </a:prstGeom>
-          <a:solidFill>
-            <a:srgbClr val="E5F5FB"/>
-          </a:solidFill>
-          <a:ln>
-            <a:noFill/>
-          </a:ln>
-          <a:effectLst/>
-        </p:spPr>
-        <p:style>
-          <a:lnRef idx="1">
-            <a:schemeClr val="accent1"/>
-          </a:lnRef>
-          <a:fillRef idx="3">
-            <a:schemeClr val="accent1"/>
-          </a:fillRef>
-          <a:effectRef idx="2">
-            <a:schemeClr val="accent1"/>
-          </a:effectRef>
-          <a:fontRef idx="minor">
-            <a:schemeClr val="lt1"/>
-          </a:fontRef>
-        </p:style>
-        <p:txBody>
-          <a:bodyPr rtlCol="0" anchor="ctr"/>
-          <a:lstStyle/>
-          <a:p>
-            <a:pPr algn="ctr"/>
-          </a:p>
-        </p:txBody>
-      </p:sp>
-      <p:sp>
-        <p:nvSpPr>
-          <p:cNvPr id="6" name="TextBox 5"/>
-          <p:cNvSpPr txBox="1"/>
-          <p:nvPr/>
-        </p:nvSpPr>
-        <p:spPr>
-          <a:xfrm>
-            <a:off x="859536" y="4626864"/>
-            <a:ext cx="10479024" cy="1051560"/>
-          </a:xfrm>
-          <a:prstGeom prst="rect">
-            <a:avLst/>
-          </a:prstGeom>
-          <a:noFill/>
-        </p:spPr>
-        <p:txBody>
-          <a:bodyPr wrap="square">
-            <a:spAutoFit/>
-          </a:bodyPr>
-          <a:lstStyle/>
-          <a:p>
-            <a:pPr>
-              <a:spcAft>
-                <a:spcPts val="700"/>
-              </a:spcAft>
-            </a:pPr>
-            <a:r>
-              <a:rPr sz="2300" b="1" i="0">
-                <a:solidFill>
-                  <a:srgbClr val="006E96"/>
-                </a:solidFill>
-                <a:latin typeface="Arial"/>
-              </a:rPr>
-              <a:t>The architect informs; the chair decides.</a:t>
-            </a:r>
-          </a:p>
-        </p:txBody>
-      </p:sp>
-      <p:sp>
-        <p:nvSpPr>
-          <p:cNvPr id="7" name="TextBox 6"/>
-          <p:cNvSpPr txBox="1"/>
-          <p:nvPr/>
-        </p:nvSpPr>
-        <p:spPr>
-          <a:xfrm>
-            <a:off x="457200" y="6473952"/>
-            <a:ext cx="7772400" cy="292608"/>
-          </a:xfrm>
-          <a:prstGeom prst="rect">
-            <a:avLst/>
-          </a:prstGeom>
-          <a:noFill/>
-        </p:spPr>
-        <p:txBody>
-          <a:bodyPr wrap="square">
-            <a:spAutoFit/>
-          </a:bodyPr>
-          <a:lstStyle/>
-          <a:p>
-            <a:r>
-              <a:rPr sz="900" b="0" i="0">
-                <a:solidFill>
-                  <a:srgbClr val="595959"/>
-                </a:solidFill>
-                <a:latin typeface="Arial"/>
-              </a:rPr>
-              <a:t>3.4 · Stand up an EA Board that can actually say no</a:t>
-            </a:r>
-          </a:p>
-        </p:txBody>
-      </p:sp>
-    </p:spTree>
-  </p:cSld>
-  <p:clrMapOvr>
-    <a:masterClrMapping/>
-  </p:clrMapOvr>
-</p:sld>
-</file>
-
 <file path=ppt/slides/slide29.xml><?xml version="1.0" encoding="utf-8"?>
 <p:sld xmlns:a="http://schemas.openxmlformats.org/drawingml/2006/main" xmlns:p="http://schemas.openxmlformats.org/presentationml/2006/main" xmlns:r="http://schemas.openxmlformats.org/officeDocument/2006/relationships">
   <p:cSld>
@@ -13058,58 +11673,14 @@
       <p:grpSpPr/>
       <p:sp>
         <p:nvSpPr>
-          <p:cNvPr id="2" name="Rectangle 1"/>
-          <p:cNvSpPr/>
-          <p:nvPr/>
-        </p:nvSpPr>
-        <p:spPr>
-          <a:xfrm>
-            <a:off x="457200" y="384048"/>
-            <a:ext cx="45720" cy="256032"/>
-          </a:xfrm>
-          <a:prstGeom prst="rect">
-            <a:avLst/>
-          </a:prstGeom>
-          <a:solidFill>
-            <a:srgbClr val="009CD6"/>
-          </a:solidFill>
-          <a:ln>
-            <a:noFill/>
-          </a:ln>
-          <a:effectLst/>
-        </p:spPr>
-        <p:style>
-          <a:lnRef idx="1">
-            <a:schemeClr val="accent1"/>
-          </a:lnRef>
-          <a:fillRef idx="3">
-            <a:schemeClr val="accent1"/>
-          </a:fillRef>
-          <a:effectRef idx="2">
-            <a:schemeClr val="accent1"/>
-          </a:effectRef>
-          <a:fontRef idx="minor">
-            <a:schemeClr val="lt1"/>
-          </a:fontRef>
-        </p:style>
-        <p:txBody>
-          <a:bodyPr rtlCol="0" anchor="ctr"/>
-          <a:lstStyle/>
-          <a:p>
-            <a:pPr algn="ctr"/>
-          </a:p>
-        </p:txBody>
-      </p:sp>
-      <p:sp>
-        <p:nvSpPr>
-          <p:cNvPr id="3" name="TextBox 2"/>
+          <p:cNvPr id="2" name="TextBox 1"/>
           <p:cNvSpPr txBox="1"/>
           <p:nvPr/>
         </p:nvSpPr>
         <p:spPr>
           <a:xfrm>
-            <a:off x="621792" y="274320"/>
-            <a:ext cx="11247120" cy="914400"/>
+            <a:off x="822960" y="822960"/>
+            <a:ext cx="7315200" cy="457200"/>
           </a:xfrm>
           <a:prstGeom prst="rect">
             <a:avLst/>
@@ -13123,66 +11694,81 @@
           <a:lstStyle/>
           <a:p>
             <a:r>
-              <a:rPr sz="2800" b="1" i="0">
+              <a:rPr sz="1200" b="1" i="0">
+                <a:solidFill>
+                  <a:srgbClr val="595959"/>
+                </a:solidFill>
+                <a:latin typeface="Arial"/>
+              </a:rPr>
+              <a:t>KP1 · MODULE 3 · VIDEO 3.4</a:t>
+            </a:r>
+          </a:p>
+        </p:txBody>
+      </p:sp>
+      <p:sp>
+        <p:nvSpPr>
+          <p:cNvPr id="3" name="TextBox 2"/>
+          <p:cNvSpPr txBox="1"/>
+          <p:nvPr/>
+        </p:nvSpPr>
+        <p:spPr>
+          <a:xfrm>
+            <a:off x="822960" y="1828800"/>
+            <a:ext cx="2011680" cy="1097280"/>
+          </a:xfrm>
+          <a:prstGeom prst="rect">
+            <a:avLst/>
+          </a:prstGeom>
+          <a:noFill/>
+        </p:spPr>
+        <p:txBody>
+          <a:bodyPr wrap="square">
+            <a:spAutoFit/>
+          </a:bodyPr>
+          <a:lstStyle/>
+          <a:p>
+            <a:r>
+              <a:rPr sz="6000" b="1" i="0">
+                <a:solidFill>
+                  <a:srgbClr val="009CD6"/>
+                </a:solidFill>
+                <a:latin typeface="Arial"/>
+              </a:rPr>
+              <a:t>3.4</a:t>
+            </a:r>
+          </a:p>
+        </p:txBody>
+      </p:sp>
+      <p:sp>
+        <p:nvSpPr>
+          <p:cNvPr id="4" name="TextBox 3"/>
+          <p:cNvSpPr txBox="1"/>
+          <p:nvPr/>
+        </p:nvSpPr>
+        <p:spPr>
+          <a:xfrm>
+            <a:off x="822960" y="2880360"/>
+            <a:ext cx="9601200" cy="1371600"/>
+          </a:xfrm>
+          <a:prstGeom prst="rect">
+            <a:avLst/>
+          </a:prstGeom>
+          <a:noFill/>
+        </p:spPr>
+        <p:txBody>
+          <a:bodyPr wrap="square">
+            <a:spAutoFit/>
+          </a:bodyPr>
+          <a:lstStyle/>
+          <a:p>
+            <a:r>
+              <a:rPr sz="3400" b="1" i="0">
                 <a:solidFill>
                   <a:srgbClr val="1A1A1A"/>
                 </a:solidFill>
                 <a:latin typeface="Arial"/>
               </a:rPr>
-              <a:t>Membership follows the affected systems, not convenience</a:t>
-            </a:r>
-          </a:p>
-        </p:txBody>
-      </p:sp>
-      <p:sp>
-        <p:nvSpPr>
-          <p:cNvPr id="4" name="Oval 3"/>
-          <p:cNvSpPr/>
-          <p:nvPr/>
-        </p:nvSpPr>
-        <p:spPr>
-          <a:xfrm>
-            <a:off x="621792" y="1508760"/>
-            <a:ext cx="310896" cy="310896"/>
-          </a:xfrm>
-          <a:prstGeom prst="ellipse">
-            <a:avLst/>
-          </a:prstGeom>
-          <a:solidFill>
-            <a:srgbClr val="009CD6"/>
-          </a:solidFill>
-          <a:ln>
-            <a:noFill/>
-          </a:ln>
-          <a:effectLst/>
-        </p:spPr>
-        <p:style>
-          <a:lnRef idx="1">
-            <a:schemeClr val="accent1"/>
-          </a:lnRef>
-          <a:fillRef idx="3">
-            <a:schemeClr val="accent1"/>
-          </a:fillRef>
-          <a:effectRef idx="2">
-            <a:schemeClr val="accent1"/>
-          </a:effectRef>
-          <a:fontRef idx="minor">
-            <a:schemeClr val="lt1"/>
-          </a:fontRef>
-        </p:style>
-        <p:txBody>
-          <a:bodyPr rtlCol="0" anchor="ctr" lIns="0" rIns="0" tIns="0" bIns="0" wrap="square"/>
-          <a:lstStyle/>
-          <a:p>
-            <a:pPr algn="ctr"/>
-            <a:r>
-              <a:rPr sz="1300" b="1" i="0">
-                <a:solidFill>
-                  <a:srgbClr val="FFFFFF"/>
-                </a:solidFill>
-                <a:latin typeface="Arial"/>
-              </a:rPr>
-              <a:t>1</a:t>
+              <a:t>Stand up an EA Board that can actually say no</a:t>
             </a:r>
           </a:p>
         </p:txBody>
@@ -13195,8 +11781,8 @@
         </p:nvSpPr>
         <p:spPr>
           <a:xfrm>
-            <a:off x="1115568" y="1463040"/>
-            <a:ext cx="10527487" cy="1028699"/>
+            <a:off x="822960" y="4343400"/>
+            <a:ext cx="9875520" cy="1554480"/>
           </a:xfrm>
           <a:prstGeom prst="rect">
             <a:avLst/>
@@ -13209,146 +11795,28 @@
           </a:bodyPr>
           <a:lstStyle/>
           <a:p>
-            <a:pPr>
-              <a:spcAft>
-                <a:spcPts val="300"/>
-              </a:spcAft>
-            </a:pPr>
-            <a:r>
-              <a:rPr sz="1900" b="1" i="0">
-                <a:solidFill>
-                  <a:srgbClr val="1A1A1A"/>
-                </a:solidFill>
-                <a:latin typeface="Arial"/>
-              </a:rPr>
-              <a:t>The sector ministry CIOs</a:t>
-            </a:r>
-          </a:p>
-          <a:p>
-            <a:pPr>
-              <a:spcAft>
-                <a:spcPts val="300"/>
-              </a:spcAft>
-            </a:pPr>
-            <a:r>
-              <a:rPr sz="1550" b="0" i="0">
+            <a:r>
+              <a:rPr sz="1700" b="0" i="1">
                 <a:solidFill>
                   <a:srgbClr val="595959"/>
                 </a:solidFill>
                 <a:latin typeface="Arial"/>
               </a:rPr>
-              <a:t>Their systems carry the decisions.</a:t>
-            </a:r>
-          </a:p>
-        </p:txBody>
-      </p:sp>
-      <p:sp>
-        <p:nvSpPr>
-          <p:cNvPr id="6" name="Rectangle 5"/>
-          <p:cNvSpPr/>
-          <p:nvPr/>
-        </p:nvSpPr>
-        <p:spPr>
-          <a:xfrm>
-            <a:off x="621792" y="2496312"/>
-            <a:ext cx="10881360" cy="12700"/>
-          </a:xfrm>
-          <a:prstGeom prst="rect">
-            <a:avLst/>
-          </a:prstGeom>
-          <a:solidFill>
-            <a:srgbClr val="DDECF4"/>
-          </a:solidFill>
-          <a:ln>
-            <a:noFill/>
-          </a:ln>
-          <a:effectLst/>
-        </p:spPr>
-        <p:style>
-          <a:lnRef idx="1">
-            <a:schemeClr val="accent1"/>
-          </a:lnRef>
-          <a:fillRef idx="3">
-            <a:schemeClr val="accent1"/>
-          </a:fillRef>
-          <a:effectRef idx="2">
-            <a:schemeClr val="accent1"/>
-          </a:effectRef>
-          <a:fontRef idx="minor">
-            <a:schemeClr val="lt1"/>
-          </a:fontRef>
-        </p:style>
-        <p:txBody>
-          <a:bodyPr rtlCol="0" anchor="ctr"/>
-          <a:lstStyle/>
-          <a:p>
-            <a:pPr algn="ctr"/>
-          </a:p>
-        </p:txBody>
-      </p:sp>
-      <p:sp>
-        <p:nvSpPr>
-          <p:cNvPr id="7" name="Oval 6"/>
-          <p:cNvSpPr/>
-          <p:nvPr/>
-        </p:nvSpPr>
-        <p:spPr>
-          <a:xfrm>
-            <a:off x="621792" y="2583179"/>
-            <a:ext cx="310896" cy="310896"/>
-          </a:xfrm>
-          <a:prstGeom prst="ellipse">
-            <a:avLst/>
-          </a:prstGeom>
-          <a:solidFill>
-            <a:srgbClr val="009CD6"/>
-          </a:solidFill>
-          <a:ln>
-            <a:noFill/>
-          </a:ln>
-          <a:effectLst/>
-        </p:spPr>
-        <p:style>
-          <a:lnRef idx="1">
-            <a:schemeClr val="accent1"/>
-          </a:lnRef>
-          <a:fillRef idx="3">
-            <a:schemeClr val="accent1"/>
-          </a:fillRef>
-          <a:effectRef idx="2">
-            <a:schemeClr val="accent1"/>
-          </a:effectRef>
-          <a:fontRef idx="minor">
-            <a:schemeClr val="lt1"/>
-          </a:fontRef>
-        </p:style>
-        <p:txBody>
-          <a:bodyPr rtlCol="0" anchor="ctr" lIns="0" rIns="0" tIns="0" bIns="0" wrap="square"/>
-          <a:lstStyle/>
-          <a:p>
-            <a:pPr algn="ctr"/>
-            <a:r>
-              <a:rPr sz="1300" b="1" i="0">
-                <a:solidFill>
-                  <a:srgbClr val="FFFFFF"/>
-                </a:solidFill>
-                <a:latin typeface="Arial"/>
-              </a:rPr>
-              <a:t>2</a:t>
-            </a:r>
-          </a:p>
-        </p:txBody>
-      </p:sp>
-      <p:sp>
-        <p:nvSpPr>
-          <p:cNvPr id="8" name="TextBox 7"/>
+              <a:t>An EA Board with binding authority — the right chair, the right members, a regular cadence, and a mandate that lets it say no — is what turns the architecture from a document into the place every digital decision passes through.</a:t>
+            </a:r>
+          </a:p>
+        </p:txBody>
+      </p:sp>
+      <p:sp>
+        <p:nvSpPr>
+          <p:cNvPr id="6" name="TextBox 5"/>
           <p:cNvSpPr txBox="1"/>
           <p:nvPr/>
         </p:nvSpPr>
         <p:spPr>
           <a:xfrm>
-            <a:off x="1115568" y="2537460"/>
-            <a:ext cx="10527487" cy="1028699"/>
+            <a:off x="822960" y="5989320"/>
+            <a:ext cx="7315200" cy="365760"/>
           </a:xfrm>
           <a:prstGeom prst="rect">
             <a:avLst/>
@@ -13361,407 +11829,14 @@
           </a:bodyPr>
           <a:lstStyle/>
           <a:p>
-            <a:pPr>
-              <a:spcAft>
-                <a:spcPts val="300"/>
-              </a:spcAft>
-            </a:pPr>
-            <a:r>
-              <a:rPr sz="1900" b="1" i="0">
-                <a:solidFill>
-                  <a:srgbClr val="1A1A1A"/>
-                </a:solidFill>
-                <a:latin typeface="Arial"/>
-              </a:rPr>
-              <a:t>The owners of the major state registries</a:t>
-            </a:r>
-          </a:p>
-          <a:p>
-            <a:pPr>
-              <a:spcAft>
-                <a:spcPts val="300"/>
-              </a:spcAft>
-            </a:pPr>
-            <a:r>
-              <a:rPr sz="1550" b="0" i="0">
+            <a:r>
+              <a:rPr sz="1200" b="0" i="0">
                 <a:solidFill>
                   <a:srgbClr val="595959"/>
                 </a:solidFill>
                 <a:latin typeface="Arial"/>
               </a:rPr>
-              <a:t>The identity authority, the population register.</a:t>
-            </a:r>
-          </a:p>
-        </p:txBody>
-      </p:sp>
-      <p:sp>
-        <p:nvSpPr>
-          <p:cNvPr id="9" name="Rectangle 8"/>
-          <p:cNvSpPr/>
-          <p:nvPr/>
-        </p:nvSpPr>
-        <p:spPr>
-          <a:xfrm>
-            <a:off x="621792" y="3570732"/>
-            <a:ext cx="10881360" cy="12700"/>
-          </a:xfrm>
-          <a:prstGeom prst="rect">
-            <a:avLst/>
-          </a:prstGeom>
-          <a:solidFill>
-            <a:srgbClr val="DDECF4"/>
-          </a:solidFill>
-          <a:ln>
-            <a:noFill/>
-          </a:ln>
-          <a:effectLst/>
-        </p:spPr>
-        <p:style>
-          <a:lnRef idx="1">
-            <a:schemeClr val="accent1"/>
-          </a:lnRef>
-          <a:fillRef idx="3">
-            <a:schemeClr val="accent1"/>
-          </a:fillRef>
-          <a:effectRef idx="2">
-            <a:schemeClr val="accent1"/>
-          </a:effectRef>
-          <a:fontRef idx="minor">
-            <a:schemeClr val="lt1"/>
-          </a:fontRef>
-        </p:style>
-        <p:txBody>
-          <a:bodyPr rtlCol="0" anchor="ctr"/>
-          <a:lstStyle/>
-          <a:p>
-            <a:pPr algn="ctr"/>
-          </a:p>
-        </p:txBody>
-      </p:sp>
-      <p:sp>
-        <p:nvSpPr>
-          <p:cNvPr id="10" name="Oval 9"/>
-          <p:cNvSpPr/>
-          <p:nvPr/>
-        </p:nvSpPr>
-        <p:spPr>
-          <a:xfrm>
-            <a:off x="621792" y="3657599"/>
-            <a:ext cx="310896" cy="310896"/>
-          </a:xfrm>
-          <a:prstGeom prst="ellipse">
-            <a:avLst/>
-          </a:prstGeom>
-          <a:solidFill>
-            <a:srgbClr val="009CD6"/>
-          </a:solidFill>
-          <a:ln>
-            <a:noFill/>
-          </a:ln>
-          <a:effectLst/>
-        </p:spPr>
-        <p:style>
-          <a:lnRef idx="1">
-            <a:schemeClr val="accent1"/>
-          </a:lnRef>
-          <a:fillRef idx="3">
-            <a:schemeClr val="accent1"/>
-          </a:fillRef>
-          <a:effectRef idx="2">
-            <a:schemeClr val="accent1"/>
-          </a:effectRef>
-          <a:fontRef idx="minor">
-            <a:schemeClr val="lt1"/>
-          </a:fontRef>
-        </p:style>
-        <p:txBody>
-          <a:bodyPr rtlCol="0" anchor="ctr" lIns="0" rIns="0" tIns="0" bIns="0" wrap="square"/>
-          <a:lstStyle/>
-          <a:p>
-            <a:pPr algn="ctr"/>
-            <a:r>
-              <a:rPr sz="1300" b="1" i="0">
-                <a:solidFill>
-                  <a:srgbClr val="FFFFFF"/>
-                </a:solidFill>
-                <a:latin typeface="Arial"/>
-              </a:rPr>
-              <a:t>3</a:t>
-            </a:r>
-          </a:p>
-        </p:txBody>
-      </p:sp>
-      <p:sp>
-        <p:nvSpPr>
-          <p:cNvPr id="11" name="TextBox 10"/>
-          <p:cNvSpPr txBox="1"/>
-          <p:nvPr/>
-        </p:nvSpPr>
-        <p:spPr>
-          <a:xfrm>
-            <a:off x="1115568" y="3611879"/>
-            <a:ext cx="10527487" cy="1028699"/>
-          </a:xfrm>
-          <a:prstGeom prst="rect">
-            <a:avLst/>
-          </a:prstGeom>
-          <a:noFill/>
-        </p:spPr>
-        <p:txBody>
-          <a:bodyPr wrap="square">
-            <a:spAutoFit/>
-          </a:bodyPr>
-          <a:lstStyle/>
-          <a:p>
-            <a:pPr>
-              <a:spcAft>
-                <a:spcPts val="300"/>
-              </a:spcAft>
-            </a:pPr>
-            <a:r>
-              <a:rPr sz="1900" b="1" i="0">
-                <a:solidFill>
-                  <a:srgbClr val="1A1A1A"/>
-                </a:solidFill>
-                <a:latin typeface="Arial"/>
-              </a:rPr>
-              <a:t>The data-protection regulator</a:t>
-            </a:r>
-          </a:p>
-          <a:p>
-            <a:pPr>
-              <a:spcAft>
-                <a:spcPts val="300"/>
-              </a:spcAft>
-            </a:pPr>
-            <a:r>
-              <a:rPr sz="1550" b="0" i="0">
-                <a:solidFill>
-                  <a:srgbClr val="595959"/>
-                </a:solidFill>
-                <a:latin typeface="Arial"/>
-              </a:rPr>
-              <a:t>Wherever data-sharing is in play.</a:t>
-            </a:r>
-          </a:p>
-        </p:txBody>
-      </p:sp>
-      <p:sp>
-        <p:nvSpPr>
-          <p:cNvPr id="12" name="Rectangle 11"/>
-          <p:cNvSpPr/>
-          <p:nvPr/>
-        </p:nvSpPr>
-        <p:spPr>
-          <a:xfrm>
-            <a:off x="621792" y="4645152"/>
-            <a:ext cx="10881360" cy="12700"/>
-          </a:xfrm>
-          <a:prstGeom prst="rect">
-            <a:avLst/>
-          </a:prstGeom>
-          <a:solidFill>
-            <a:srgbClr val="DDECF4"/>
-          </a:solidFill>
-          <a:ln>
-            <a:noFill/>
-          </a:ln>
-          <a:effectLst/>
-        </p:spPr>
-        <p:style>
-          <a:lnRef idx="1">
-            <a:schemeClr val="accent1"/>
-          </a:lnRef>
-          <a:fillRef idx="3">
-            <a:schemeClr val="accent1"/>
-          </a:fillRef>
-          <a:effectRef idx="2">
-            <a:schemeClr val="accent1"/>
-          </a:effectRef>
-          <a:fontRef idx="minor">
-            <a:schemeClr val="lt1"/>
-          </a:fontRef>
-        </p:style>
-        <p:txBody>
-          <a:bodyPr rtlCol="0" anchor="ctr"/>
-          <a:lstStyle/>
-          <a:p>
-            <a:pPr algn="ctr"/>
-          </a:p>
-        </p:txBody>
-      </p:sp>
-      <p:sp>
-        <p:nvSpPr>
-          <p:cNvPr id="13" name="Oval 12"/>
-          <p:cNvSpPr/>
-          <p:nvPr/>
-        </p:nvSpPr>
-        <p:spPr>
-          <a:xfrm>
-            <a:off x="621792" y="4732020"/>
-            <a:ext cx="310896" cy="310896"/>
-          </a:xfrm>
-          <a:prstGeom prst="ellipse">
-            <a:avLst/>
-          </a:prstGeom>
-          <a:solidFill>
-            <a:srgbClr val="009CD6"/>
-          </a:solidFill>
-          <a:ln>
-            <a:noFill/>
-          </a:ln>
-          <a:effectLst/>
-        </p:spPr>
-        <p:style>
-          <a:lnRef idx="1">
-            <a:schemeClr val="accent1"/>
-          </a:lnRef>
-          <a:fillRef idx="3">
-            <a:schemeClr val="accent1"/>
-          </a:fillRef>
-          <a:effectRef idx="2">
-            <a:schemeClr val="accent1"/>
-          </a:effectRef>
-          <a:fontRef idx="minor">
-            <a:schemeClr val="lt1"/>
-          </a:fontRef>
-        </p:style>
-        <p:txBody>
-          <a:bodyPr rtlCol="0" anchor="ctr" lIns="0" rIns="0" tIns="0" bIns="0" wrap="square"/>
-          <a:lstStyle/>
-          <a:p>
-            <a:pPr algn="ctr"/>
-            <a:r>
-              <a:rPr sz="1300" b="1" i="0">
-                <a:solidFill>
-                  <a:srgbClr val="FFFFFF"/>
-                </a:solidFill>
-                <a:latin typeface="Arial"/>
-              </a:rPr>
-              <a:t>4</a:t>
-            </a:r>
-          </a:p>
-        </p:txBody>
-      </p:sp>
-      <p:sp>
-        <p:nvSpPr>
-          <p:cNvPr id="14" name="TextBox 13"/>
-          <p:cNvSpPr txBox="1"/>
-          <p:nvPr/>
-        </p:nvSpPr>
-        <p:spPr>
-          <a:xfrm>
-            <a:off x="1115568" y="4686300"/>
-            <a:ext cx="10527487" cy="1028699"/>
-          </a:xfrm>
-          <a:prstGeom prst="rect">
-            <a:avLst/>
-          </a:prstGeom>
-          <a:noFill/>
-        </p:spPr>
-        <p:txBody>
-          <a:bodyPr wrap="square">
-            <a:spAutoFit/>
-          </a:bodyPr>
-          <a:lstStyle/>
-          <a:p>
-            <a:pPr>
-              <a:spcAft>
-                <a:spcPts val="300"/>
-              </a:spcAft>
-            </a:pPr>
-            <a:r>
-              <a:rPr sz="1900" b="1" i="0">
-                <a:solidFill>
-                  <a:srgbClr val="1A1A1A"/>
-                </a:solidFill>
-                <a:latin typeface="Arial"/>
-              </a:rPr>
-              <a:t>One external advisor</a:t>
-            </a:r>
-          </a:p>
-          <a:p>
-            <a:pPr>
-              <a:spcAft>
-                <a:spcPts val="300"/>
-              </a:spcAft>
-            </a:pPr>
-            <a:r>
-              <a:rPr sz="1550" b="0" i="0">
-                <a:solidFill>
-                  <a:srgbClr val="595959"/>
-                </a:solidFill>
-                <a:latin typeface="Arial"/>
-              </a:rPr>
-              <a:t>Where an outside perspective is useful.</a:t>
-            </a:r>
-          </a:p>
-        </p:txBody>
-      </p:sp>
-      <p:sp>
-        <p:nvSpPr>
-          <p:cNvPr id="15" name="TextBox 14"/>
-          <p:cNvSpPr txBox="1"/>
-          <p:nvPr/>
-        </p:nvSpPr>
-        <p:spPr>
-          <a:xfrm>
-            <a:off x="658368" y="5870448"/>
-            <a:ext cx="10881360" cy="548640"/>
-          </a:xfrm>
-          <a:prstGeom prst="rect">
-            <a:avLst/>
-          </a:prstGeom>
-          <a:noFill/>
-        </p:spPr>
-        <p:txBody>
-          <a:bodyPr wrap="square">
-            <a:spAutoFit/>
-          </a:bodyPr>
-          <a:lstStyle/>
-          <a:p>
-            <a:r>
-              <a:rPr sz="1550" b="1" i="0">
-                <a:solidFill>
-                  <a:srgbClr val="006E96"/>
-                </a:solidFill>
-                <a:latin typeface="Arial"/>
-              </a:rPr>
-              <a:t>A Board of the right twelve is better than a Board of the convenient forty.</a:t>
-            </a:r>
-          </a:p>
-        </p:txBody>
-      </p:sp>
-      <p:sp>
-        <p:nvSpPr>
-          <p:cNvPr id="16" name="TextBox 15"/>
-          <p:cNvSpPr txBox="1"/>
-          <p:nvPr/>
-        </p:nvSpPr>
-        <p:spPr>
-          <a:xfrm>
-            <a:off x="457200" y="6473952"/>
-            <a:ext cx="7772400" cy="292608"/>
-          </a:xfrm>
-          <a:prstGeom prst="rect">
-            <a:avLst/>
-          </a:prstGeom>
-          <a:noFill/>
-        </p:spPr>
-        <p:txBody>
-          <a:bodyPr wrap="square">
-            <a:spAutoFit/>
-          </a:bodyPr>
-          <a:lstStyle/>
-          <a:p>
-            <a:r>
-              <a:rPr sz="900" b="0" i="0">
-                <a:solidFill>
-                  <a:srgbClr val="595959"/>
-                </a:solidFill>
-                <a:latin typeface="Arial"/>
-              </a:rPr>
-              <a:t>3.4 · Stand up an EA Board that can actually say no</a:t>
+              <a:t>~4 minutes · standalone video · voice-over on text slides</a:t>
             </a:r>
           </a:p>
         </p:txBody>
@@ -13786,58 +11861,14 @@
       <p:grpSpPr/>
       <p:sp>
         <p:nvSpPr>
-          <p:cNvPr id="2" name="Rectangle 1"/>
-          <p:cNvSpPr/>
-          <p:nvPr/>
-        </p:nvSpPr>
-        <p:spPr>
-          <a:xfrm>
-            <a:off x="457200" y="384048"/>
-            <a:ext cx="45720" cy="256032"/>
-          </a:xfrm>
-          <a:prstGeom prst="rect">
-            <a:avLst/>
-          </a:prstGeom>
-          <a:solidFill>
-            <a:srgbClr val="009CD6"/>
-          </a:solidFill>
-          <a:ln>
-            <a:noFill/>
-          </a:ln>
-          <a:effectLst/>
-        </p:spPr>
-        <p:style>
-          <a:lnRef idx="1">
-            <a:schemeClr val="accent1"/>
-          </a:lnRef>
-          <a:fillRef idx="3">
-            <a:schemeClr val="accent1"/>
-          </a:fillRef>
-          <a:effectRef idx="2">
-            <a:schemeClr val="accent1"/>
-          </a:effectRef>
-          <a:fontRef idx="minor">
-            <a:schemeClr val="lt1"/>
-          </a:fontRef>
-        </p:style>
-        <p:txBody>
-          <a:bodyPr rtlCol="0" anchor="ctr"/>
-          <a:lstStyle/>
-          <a:p>
-            <a:pPr algn="ctr"/>
-          </a:p>
-        </p:txBody>
-      </p:sp>
-      <p:sp>
-        <p:nvSpPr>
-          <p:cNvPr id="3" name="TextBox 2"/>
+          <p:cNvPr id="2" name="TextBox 1"/>
           <p:cNvSpPr txBox="1"/>
           <p:nvPr/>
         </p:nvSpPr>
         <p:spPr>
           <a:xfrm>
-            <a:off x="621792" y="274320"/>
-            <a:ext cx="11247120" cy="914400"/>
+            <a:off x="1005840" y="1325880"/>
+            <a:ext cx="5486400" cy="365760"/>
           </a:xfrm>
           <a:prstGeom prst="rect">
             <a:avLst/>
@@ -13851,73 +11882,61 @@
           <a:lstStyle/>
           <a:p>
             <a:r>
-              <a:rPr sz="2800" b="1" i="0">
+              <a:rPr sz="1200" b="1" i="0">
+                <a:solidFill>
+                  <a:srgbClr val="006E96"/>
+                </a:solidFill>
+                <a:latin typeface="Arial"/>
+              </a:rPr>
+              <a:t>WHERE WE START</a:t>
+            </a:r>
+          </a:p>
+        </p:txBody>
+      </p:sp>
+      <p:sp>
+        <p:nvSpPr>
+          <p:cNvPr id="3" name="TextBox 2"/>
+          <p:cNvSpPr txBox="1"/>
+          <p:nvPr/>
+        </p:nvSpPr>
+        <p:spPr>
+          <a:xfrm>
+            <a:off x="1005840" y="1783080"/>
+            <a:ext cx="10149840" cy="1737360"/>
+          </a:xfrm>
+          <a:prstGeom prst="rect">
+            <a:avLst/>
+          </a:prstGeom>
+          <a:noFill/>
+        </p:spPr>
+        <p:txBody>
+          <a:bodyPr wrap="square">
+            <a:spAutoFit/>
+          </a:bodyPr>
+          <a:lstStyle/>
+          <a:p>
+            <a:r>
+              <a:rPr sz="3000" b="1" i="0">
                 <a:solidFill>
                   <a:srgbClr val="1A1A1A"/>
                 </a:solidFill>
                 <a:latin typeface="Arial"/>
               </a:rPr>
-              <a:t>Govern on a cadence that does not become the bottleneck</a:t>
-            </a:r>
-          </a:p>
-        </p:txBody>
-      </p:sp>
-      <p:sp>
-        <p:nvSpPr>
-          <p:cNvPr id="4" name="Rounded Rectangle 3"/>
-          <p:cNvSpPr/>
-          <p:nvPr/>
-        </p:nvSpPr>
-        <p:spPr>
-          <a:xfrm>
-            <a:off x="658368" y="1554480"/>
-            <a:ext cx="5394960" cy="3977639"/>
-          </a:xfrm>
-          <a:prstGeom prst="roundRect">
-            <a:avLst>
-              <a:gd name="adj" fmla="val 4500"/>
-            </a:avLst>
-          </a:prstGeom>
-          <a:solidFill>
-            <a:srgbClr val="E5F5FB"/>
-          </a:solidFill>
-          <a:ln>
-            <a:noFill/>
-          </a:ln>
-          <a:effectLst/>
-        </p:spPr>
-        <p:style>
-          <a:lnRef idx="1">
-            <a:schemeClr val="accent1"/>
-          </a:lnRef>
-          <a:fillRef idx="3">
-            <a:schemeClr val="accent1"/>
-          </a:fillRef>
-          <a:effectRef idx="2">
-            <a:schemeClr val="accent1"/>
-          </a:effectRef>
-          <a:fontRef idx="minor">
-            <a:schemeClr val="lt1"/>
-          </a:fontRef>
-        </p:style>
-        <p:txBody>
-          <a:bodyPr rtlCol="0" anchor="ctr"/>
-          <a:lstStyle/>
-          <a:p>
-            <a:pPr algn="ctr"/>
-          </a:p>
-        </p:txBody>
-      </p:sp>
-      <p:sp>
-        <p:nvSpPr>
-          <p:cNvPr id="5" name="TextBox 4"/>
+              <a:t>The repository holds the architecture. The Board gives it authority.</a:t>
+            </a:r>
+          </a:p>
+        </p:txBody>
+      </p:sp>
+      <p:sp>
+        <p:nvSpPr>
+          <p:cNvPr id="4" name="TextBox 3"/>
           <p:cNvSpPr txBox="1"/>
           <p:nvPr/>
         </p:nvSpPr>
         <p:spPr>
           <a:xfrm>
-            <a:off x="859536" y="1700784"/>
-            <a:ext cx="4992624" cy="3703320"/>
+            <a:off x="1005840" y="3611880"/>
+            <a:ext cx="10149840" cy="2377440"/>
           </a:xfrm>
           <a:prstGeom prst="rect">
             <a:avLst/>
@@ -13932,207 +11951,40 @@
           <a:p>
             <a:pPr>
               <a:spcAft>
-                <a:spcPts val="700"/>
+                <a:spcPts val="800"/>
               </a:spcAft>
             </a:pPr>
             <a:r>
-              <a:rPr sz="1900" b="1" i="0">
+              <a:rPr sz="1700" b="0" i="0">
                 <a:solidFill>
-                  <a:srgbClr val="006E96"/>
+                  <a:srgbClr val="595959"/>
                 </a:solidFill>
                 <a:latin typeface="Arial"/>
               </a:rPr>
-              <a:t>QUARTERLY — THE MAIN MEETING</a:t>
+              <a:t>Without a governance board, the architecture is a document people can ignore.</a:t>
             </a:r>
           </a:p>
           <a:p>
             <a:pPr>
               <a:spcAft>
-                <a:spcPts val="700"/>
+                <a:spcPts val="800"/>
               </a:spcAft>
             </a:pPr>
             <a:r>
-              <a:rPr sz="1600" b="0" i="0">
+              <a:rPr sz="1700" b="0" i="0">
                 <a:solidFill>
-                  <a:srgbClr val="1A1A1A"/>
+                  <a:srgbClr val="595959"/>
                 </a:solidFill>
                 <a:latin typeface="Arial"/>
               </a:rPr>
-              <a:t>Review the architecture as a whole.</a:t>
-            </a:r>
-          </a:p>
-          <a:p>
-            <a:pPr>
-              <a:spcAft>
-                <a:spcPts val="700"/>
-              </a:spcAft>
-            </a:pPr>
-            <a:r>
-              <a:rPr sz="1600" b="0" i="0">
-                <a:solidFill>
-                  <a:srgbClr val="1A1A1A"/>
-                </a:solidFill>
-                <a:latin typeface="Arial"/>
-              </a:rPr>
-              <a:t>What changed, what is drifting, what to prioritise next.</a:t>
-            </a:r>
-          </a:p>
-        </p:txBody>
-      </p:sp>
-      <p:sp>
-        <p:nvSpPr>
-          <p:cNvPr id="6" name="Rounded Rectangle 5"/>
-          <p:cNvSpPr/>
-          <p:nvPr/>
-        </p:nvSpPr>
-        <p:spPr>
-          <a:xfrm>
-            <a:off x="6263640" y="1554480"/>
-            <a:ext cx="5394960" cy="3977639"/>
-          </a:xfrm>
-          <a:prstGeom prst="roundRect">
-            <a:avLst>
-              <a:gd name="adj" fmla="val 4500"/>
-            </a:avLst>
-          </a:prstGeom>
-          <a:solidFill>
-            <a:srgbClr val="F2F2F2"/>
-          </a:solidFill>
-          <a:ln>
-            <a:noFill/>
-          </a:ln>
-          <a:effectLst/>
-        </p:spPr>
-        <p:style>
-          <a:lnRef idx="1">
-            <a:schemeClr val="accent1"/>
-          </a:lnRef>
-          <a:fillRef idx="3">
-            <a:schemeClr val="accent1"/>
-          </a:fillRef>
-          <a:effectRef idx="2">
-            <a:schemeClr val="accent1"/>
-          </a:effectRef>
-          <a:fontRef idx="minor">
-            <a:schemeClr val="lt1"/>
-          </a:fontRef>
-        </p:style>
-        <p:txBody>
-          <a:bodyPr rtlCol="0" anchor="ctr"/>
-          <a:lstStyle/>
-          <a:p>
-            <a:pPr algn="ctr"/>
-          </a:p>
-        </p:txBody>
-      </p:sp>
-      <p:sp>
-        <p:nvSpPr>
-          <p:cNvPr id="7" name="TextBox 6"/>
-          <p:cNvSpPr txBox="1"/>
-          <p:nvPr/>
-        </p:nvSpPr>
-        <p:spPr>
-          <a:xfrm>
-            <a:off x="6464808" y="1700784"/>
-            <a:ext cx="4992624" cy="3703320"/>
-          </a:xfrm>
-          <a:prstGeom prst="rect">
-            <a:avLst/>
-          </a:prstGeom>
-          <a:noFill/>
-        </p:spPr>
-        <p:txBody>
-          <a:bodyPr wrap="square">
-            <a:spAutoFit/>
-          </a:bodyPr>
-          <a:lstStyle/>
-          <a:p>
-            <a:pPr>
-              <a:spcAft>
-                <a:spcPts val="700"/>
-              </a:spcAft>
-            </a:pPr>
-            <a:r>
-              <a:rPr sz="1900" b="1" i="0">
-                <a:solidFill>
-                  <a:srgbClr val="006E96"/>
-                </a:solidFill>
-                <a:latin typeface="Arial"/>
-              </a:rPr>
-              <a:t>AD HOC — THE FAST PATH</a:t>
-            </a:r>
-          </a:p>
-          <a:p>
-            <a:pPr>
-              <a:spcAft>
-                <a:spcPts val="700"/>
-              </a:spcAft>
-            </a:pPr>
-            <a:r>
-              <a:rPr sz="1600" b="0" i="0">
-                <a:solidFill>
-                  <a:srgbClr val="1A1A1A"/>
-                </a:solidFill>
-                <a:latin typeface="Arial"/>
-              </a:rPr>
-              <a:t>Urgent project decisions.</a:t>
-            </a:r>
-          </a:p>
-          <a:p>
-            <a:pPr>
-              <a:spcAft>
-                <a:spcPts val="700"/>
-              </a:spcAft>
-            </a:pPr>
-            <a:r>
-              <a:rPr sz="1600" b="0" i="0">
-                <a:solidFill>
-                  <a:srgbClr val="1A1A1A"/>
-                </a:solidFill>
-                <a:latin typeface="Arial"/>
-              </a:rPr>
-              <a:t>So a programme on a deadline is not stuck for three months waiting for the next quarterly.</a:t>
-            </a:r>
-          </a:p>
-        </p:txBody>
-      </p:sp>
-      <p:sp>
-        <p:nvSpPr>
-          <p:cNvPr id="8" name="TextBox 7"/>
-          <p:cNvSpPr txBox="1"/>
-          <p:nvPr/>
-        </p:nvSpPr>
-        <p:spPr>
-          <a:xfrm>
-            <a:off x="658368" y="5715000"/>
-            <a:ext cx="10881360" cy="548640"/>
-          </a:xfrm>
-          <a:prstGeom prst="rect">
-            <a:avLst/>
-          </a:prstGeom>
-          <a:noFill/>
-        </p:spPr>
-        <p:txBody>
-          <a:bodyPr wrap="square">
-            <a:spAutoFit/>
-          </a:bodyPr>
-          <a:lstStyle/>
-          <a:p>
-            <a:r>
-              <a:rPr sz="1550" b="1" i="0">
-                <a:solidFill>
-                  <a:srgbClr val="006E96"/>
-                </a:solidFill>
-                <a:latin typeface="Arial"/>
-              </a:rPr>
-              <a:t>If the Board is slow, projects route around it — and you are back to no governance.</a:t>
-            </a:r>
-          </a:p>
-        </p:txBody>
-      </p:sp>
-      <p:sp>
-        <p:nvSpPr>
-          <p:cNvPr id="9" name="TextBox 8"/>
+              <a:t>With a real one — that can say no — it becomes the place every significant digital decision passes through.</a:t>
+            </a:r>
+          </a:p>
+        </p:txBody>
+      </p:sp>
+      <p:sp>
+        <p:nvSpPr>
+          <p:cNvPr id="5" name="TextBox 4"/>
           <p:cNvSpPr txBox="1"/>
           <p:nvPr/>
         </p:nvSpPr>
@@ -14160,6 +12012,41 @@
                 <a:latin typeface="Arial"/>
               </a:rPr>
               <a:t>3.4 · Stand up an EA Board that can actually say no</a:t>
+            </a:r>
+          </a:p>
+        </p:txBody>
+      </p:sp>
+      <p:sp>
+        <p:nvSpPr>
+          <p:cNvPr id="6" name="TextBox 5"/>
+          <p:cNvSpPr txBox="1"/>
+          <p:nvPr/>
+        </p:nvSpPr>
+        <p:spPr>
+          <a:xfrm>
+            <a:off x="10058400" y="6473952"/>
+            <a:ext cx="1673352" cy="292608"/>
+          </a:xfrm>
+          <a:prstGeom prst="rect">
+            <a:avLst/>
+          </a:prstGeom>
+          <a:noFill/>
+        </p:spPr>
+        <p:txBody>
+          <a:bodyPr wrap="square">
+            <a:spAutoFit/>
+          </a:bodyPr>
+          <a:lstStyle/>
+          <a:p>
+            <a:pPr algn="r"/>
+            <a:r>
+              <a:rPr sz="900" b="0" i="0">
+                <a:solidFill>
+                  <a:srgbClr val="595959"/>
+                </a:solidFill>
+                <a:latin typeface="Arial"/>
+              </a:rPr>
+              <a:t>www.itu.int</a:t>
             </a:r>
           </a:p>
         </p:txBody>
@@ -14255,27 +12142,84 @@
                 </a:solidFill>
                 <a:latin typeface="Arial"/>
               </a:rPr>
-              <a:t>The Board is the standing rhythm no single project can provide</a:t>
-            </a:r>
-          </a:p>
-        </p:txBody>
-      </p:sp>
-      <p:sp>
-        <p:nvSpPr>
-          <p:cNvPr id="4" name="Oval 3"/>
+              <a:t>An advisory board produces minutes; a binding board produces decisions</a:t>
+            </a:r>
+          </a:p>
+        </p:txBody>
+      </p:sp>
+      <p:sp>
+        <p:nvSpPr>
+          <p:cNvPr id="4" name="TextBox 3"/>
+          <p:cNvSpPr txBox="1"/>
+          <p:nvPr/>
+        </p:nvSpPr>
+        <p:spPr>
+          <a:xfrm>
+            <a:off x="658368" y="1600200"/>
+            <a:ext cx="10881360" cy="2651760"/>
+          </a:xfrm>
+          <a:prstGeom prst="rect">
+            <a:avLst/>
+          </a:prstGeom>
+          <a:noFill/>
+        </p:spPr>
+        <p:txBody>
+          <a:bodyPr wrap="square">
+            <a:spAutoFit/>
+          </a:bodyPr>
+          <a:lstStyle/>
+          <a:p>
+            <a:pPr>
+              <a:spcAft>
+                <a:spcPts val="1200"/>
+              </a:spcAft>
+            </a:pPr>
+            <a:r>
+              <a:rPr sz="2000" b="0" i="0">
+                <a:solidFill>
+                  <a:srgbClr val="1A1A1A"/>
+                </a:solidFill>
+                <a:latin typeface="Arial"/>
+              </a:rPr>
+              <a:t>An advisory board looks at a project, offers an opinion, and the project does whatever it was going to do. That is governance theatre.</a:t>
+            </a:r>
+          </a:p>
+          <a:p>
+            <a:pPr>
+              <a:spcAft>
+                <a:spcPts val="1200"/>
+              </a:spcAft>
+            </a:pPr>
+            <a:r>
+              <a:rPr sz="2000" b="0" i="0">
+                <a:solidFill>
+                  <a:srgbClr val="1A1A1A"/>
+                </a:solidFill>
+                <a:latin typeface="Arial"/>
+              </a:rPr>
+              <a:t>A binding board’s rulings are a condition of proceeding: a project told to consume the shared identity platform does so, or it does not get funded.</a:t>
+            </a:r>
+          </a:p>
+        </p:txBody>
+      </p:sp>
+      <p:sp>
+        <p:nvSpPr>
+          <p:cNvPr id="5" name="Rounded Rectangle 4"/>
           <p:cNvSpPr/>
           <p:nvPr/>
         </p:nvSpPr>
         <p:spPr>
           <a:xfrm>
-            <a:off x="621792" y="1508760"/>
-            <a:ext cx="310896" cy="310896"/>
-          </a:xfrm>
-          <a:prstGeom prst="ellipse">
-            <a:avLst/>
+            <a:off x="658368" y="4434840"/>
+            <a:ext cx="10881360" cy="1325880"/>
+          </a:xfrm>
+          <a:prstGeom prst="roundRect">
+            <a:avLst>
+              <a:gd name="adj" fmla="val 4500"/>
+            </a:avLst>
           </a:prstGeom>
           <a:solidFill>
-            <a:srgbClr val="009CD6"/>
+            <a:srgbClr val="E5F5FB"/>
           </a:solidFill>
           <a:ln>
             <a:noFill/>
@@ -14297,32 +12241,23 @@
           </a:fontRef>
         </p:style>
         <p:txBody>
-          <a:bodyPr rtlCol="0" anchor="ctr" lIns="0" rIns="0" tIns="0" bIns="0" wrap="square"/>
+          <a:bodyPr rtlCol="0" anchor="ctr"/>
           <a:lstStyle/>
           <a:p>
             <a:pPr algn="ctr"/>
-            <a:r>
-              <a:rPr sz="1300" b="1" i="0">
-                <a:solidFill>
-                  <a:srgbClr val="FFFFFF"/>
-                </a:solidFill>
-                <a:latin typeface="Arial"/>
-              </a:rPr>
-              <a:t>1</a:t>
-            </a:r>
-          </a:p>
-        </p:txBody>
-      </p:sp>
-      <p:sp>
-        <p:nvSpPr>
-          <p:cNvPr id="5" name="TextBox 4"/>
+          </a:p>
+        </p:txBody>
+      </p:sp>
+      <p:sp>
+        <p:nvSpPr>
+          <p:cNvPr id="6" name="TextBox 5"/>
           <p:cNvSpPr txBox="1"/>
           <p:nvPr/>
         </p:nvSpPr>
         <p:spPr>
           <a:xfrm>
-            <a:off x="1115568" y="1463040"/>
-            <a:ext cx="10527487" cy="1386839"/>
+            <a:off x="859536" y="4626864"/>
+            <a:ext cx="10479024" cy="1051560"/>
           </a:xfrm>
           <a:prstGeom prst="rect">
             <a:avLst/>
@@ -14337,346 +12272,24 @@
           <a:p>
             <a:pPr>
               <a:spcAft>
-                <a:spcPts val="300"/>
+                <a:spcPts val="700"/>
               </a:spcAft>
             </a:pPr>
             <a:r>
-              <a:rPr sz="1900" b="1" i="0">
-                <a:solidFill>
-                  <a:srgbClr val="1A1A1A"/>
-                </a:solidFill>
-                <a:latin typeface="Arial"/>
-              </a:rPr>
-              <a:t>The repository gives the shared picture</a:t>
-            </a:r>
-          </a:p>
-        </p:txBody>
-      </p:sp>
-      <p:sp>
-        <p:nvSpPr>
-          <p:cNvPr id="6" name="Rectangle 5"/>
-          <p:cNvSpPr/>
-          <p:nvPr/>
-        </p:nvSpPr>
-        <p:spPr>
-          <a:xfrm>
-            <a:off x="621792" y="2854452"/>
-            <a:ext cx="10881360" cy="12700"/>
-          </a:xfrm>
-          <a:prstGeom prst="rect">
-            <a:avLst/>
-          </a:prstGeom>
-          <a:solidFill>
-            <a:srgbClr val="DDECF4"/>
-          </a:solidFill>
-          <a:ln>
-            <a:noFill/>
-          </a:ln>
-          <a:effectLst/>
-        </p:spPr>
-        <p:style>
-          <a:lnRef idx="1">
-            <a:schemeClr val="accent1"/>
-          </a:lnRef>
-          <a:fillRef idx="3">
-            <a:schemeClr val="accent1"/>
-          </a:fillRef>
-          <a:effectRef idx="2">
-            <a:schemeClr val="accent1"/>
-          </a:effectRef>
-          <a:fontRef idx="minor">
-            <a:schemeClr val="lt1"/>
-          </a:fontRef>
-        </p:style>
-        <p:txBody>
-          <a:bodyPr rtlCol="0" anchor="ctr"/>
-          <a:lstStyle/>
-          <a:p>
-            <a:pPr algn="ctr"/>
-          </a:p>
-        </p:txBody>
-      </p:sp>
-      <p:sp>
-        <p:nvSpPr>
-          <p:cNvPr id="7" name="Oval 6"/>
-          <p:cNvSpPr/>
-          <p:nvPr/>
-        </p:nvSpPr>
-        <p:spPr>
-          <a:xfrm>
-            <a:off x="621792" y="2941319"/>
-            <a:ext cx="310896" cy="310896"/>
-          </a:xfrm>
-          <a:prstGeom prst="ellipse">
-            <a:avLst/>
-          </a:prstGeom>
-          <a:solidFill>
-            <a:srgbClr val="009CD6"/>
-          </a:solidFill>
-          <a:ln>
-            <a:noFill/>
-          </a:ln>
-          <a:effectLst/>
-        </p:spPr>
-        <p:style>
-          <a:lnRef idx="1">
-            <a:schemeClr val="accent1"/>
-          </a:lnRef>
-          <a:fillRef idx="3">
-            <a:schemeClr val="accent1"/>
-          </a:fillRef>
-          <a:effectRef idx="2">
-            <a:schemeClr val="accent1"/>
-          </a:effectRef>
-          <a:fontRef idx="minor">
-            <a:schemeClr val="lt1"/>
-          </a:fontRef>
-        </p:style>
-        <p:txBody>
-          <a:bodyPr rtlCol="0" anchor="ctr" lIns="0" rIns="0" tIns="0" bIns="0" wrap="square"/>
-          <a:lstStyle/>
-          <a:p>
-            <a:pPr algn="ctr"/>
-            <a:r>
-              <a:rPr sz="1300" b="1" i="0">
-                <a:solidFill>
-                  <a:srgbClr val="FFFFFF"/>
-                </a:solidFill>
-                <a:latin typeface="Arial"/>
-              </a:rPr>
-              <a:t>2</a:t>
-            </a:r>
-          </a:p>
-        </p:txBody>
-      </p:sp>
-      <p:sp>
-        <p:nvSpPr>
-          <p:cNvPr id="8" name="TextBox 7"/>
-          <p:cNvSpPr txBox="1"/>
-          <p:nvPr/>
-        </p:nvSpPr>
-        <p:spPr>
-          <a:xfrm>
-            <a:off x="1115568" y="2895600"/>
-            <a:ext cx="10527487" cy="1386839"/>
-          </a:xfrm>
-          <a:prstGeom prst="rect">
-            <a:avLst/>
-          </a:prstGeom>
-          <a:noFill/>
-        </p:spPr>
-        <p:txBody>
-          <a:bodyPr wrap="square">
-            <a:spAutoFit/>
-          </a:bodyPr>
-          <a:lstStyle/>
-          <a:p>
-            <a:pPr>
-              <a:spcAft>
-                <a:spcPts val="300"/>
-              </a:spcAft>
-            </a:pPr>
-            <a:r>
-              <a:rPr sz="1900" b="1" i="0">
-                <a:solidFill>
-                  <a:srgbClr val="1A1A1A"/>
-                </a:solidFill>
-                <a:latin typeface="Arial"/>
-              </a:rPr>
-              <a:t>The metamodel gives the shared words</a:t>
-            </a:r>
-          </a:p>
-        </p:txBody>
-      </p:sp>
-      <p:sp>
-        <p:nvSpPr>
-          <p:cNvPr id="9" name="Rectangle 8"/>
-          <p:cNvSpPr/>
-          <p:nvPr/>
-        </p:nvSpPr>
-        <p:spPr>
-          <a:xfrm>
-            <a:off x="621792" y="4287011"/>
-            <a:ext cx="10881360" cy="12700"/>
-          </a:xfrm>
-          <a:prstGeom prst="rect">
-            <a:avLst/>
-          </a:prstGeom>
-          <a:solidFill>
-            <a:srgbClr val="DDECF4"/>
-          </a:solidFill>
-          <a:ln>
-            <a:noFill/>
-          </a:ln>
-          <a:effectLst/>
-        </p:spPr>
-        <p:style>
-          <a:lnRef idx="1">
-            <a:schemeClr val="accent1"/>
-          </a:lnRef>
-          <a:fillRef idx="3">
-            <a:schemeClr val="accent1"/>
-          </a:fillRef>
-          <a:effectRef idx="2">
-            <a:schemeClr val="accent1"/>
-          </a:effectRef>
-          <a:fontRef idx="minor">
-            <a:schemeClr val="lt1"/>
-          </a:fontRef>
-        </p:style>
-        <p:txBody>
-          <a:bodyPr rtlCol="0" anchor="ctr"/>
-          <a:lstStyle/>
-          <a:p>
-            <a:pPr algn="ctr"/>
-          </a:p>
-        </p:txBody>
-      </p:sp>
-      <p:sp>
-        <p:nvSpPr>
-          <p:cNvPr id="10" name="Oval 9"/>
-          <p:cNvSpPr/>
-          <p:nvPr/>
-        </p:nvSpPr>
-        <p:spPr>
-          <a:xfrm>
-            <a:off x="621792" y="4373879"/>
-            <a:ext cx="310896" cy="310896"/>
-          </a:xfrm>
-          <a:prstGeom prst="ellipse">
-            <a:avLst/>
-          </a:prstGeom>
-          <a:solidFill>
-            <a:srgbClr val="009CD6"/>
-          </a:solidFill>
-          <a:ln>
-            <a:noFill/>
-          </a:ln>
-          <a:effectLst/>
-        </p:spPr>
-        <p:style>
-          <a:lnRef idx="1">
-            <a:schemeClr val="accent1"/>
-          </a:lnRef>
-          <a:fillRef idx="3">
-            <a:schemeClr val="accent1"/>
-          </a:fillRef>
-          <a:effectRef idx="2">
-            <a:schemeClr val="accent1"/>
-          </a:effectRef>
-          <a:fontRef idx="minor">
-            <a:schemeClr val="lt1"/>
-          </a:fontRef>
-        </p:style>
-        <p:txBody>
-          <a:bodyPr rtlCol="0" anchor="ctr" lIns="0" rIns="0" tIns="0" bIns="0" wrap="square"/>
-          <a:lstStyle/>
-          <a:p>
-            <a:pPr algn="ctr"/>
-            <a:r>
-              <a:rPr sz="1300" b="1" i="0">
-                <a:solidFill>
-                  <a:srgbClr val="FFFFFF"/>
-                </a:solidFill>
-                <a:latin typeface="Arial"/>
-              </a:rPr>
-              <a:t>3</a:t>
-            </a:r>
-          </a:p>
-        </p:txBody>
-      </p:sp>
-      <p:sp>
-        <p:nvSpPr>
-          <p:cNvPr id="11" name="TextBox 10"/>
-          <p:cNvSpPr txBox="1"/>
-          <p:nvPr/>
-        </p:nvSpPr>
-        <p:spPr>
-          <a:xfrm>
-            <a:off x="1115568" y="4328159"/>
-            <a:ext cx="10527487" cy="1386839"/>
-          </a:xfrm>
-          <a:prstGeom prst="rect">
-            <a:avLst/>
-          </a:prstGeom>
-          <a:noFill/>
-        </p:spPr>
-        <p:txBody>
-          <a:bodyPr wrap="square">
-            <a:spAutoFit/>
-          </a:bodyPr>
-          <a:lstStyle/>
-          <a:p>
-            <a:pPr>
-              <a:spcAft>
-                <a:spcPts val="300"/>
-              </a:spcAft>
-            </a:pPr>
-            <a:r>
-              <a:rPr sz="1900" b="1" i="0">
-                <a:solidFill>
-                  <a:srgbClr val="1A1A1A"/>
-                </a:solidFill>
-                <a:latin typeface="Arial"/>
-              </a:rPr>
-              <a:t>The Board gives the shared rhythm</a:t>
-            </a:r>
-          </a:p>
-          <a:p>
-            <a:pPr>
-              <a:spcAft>
-                <a:spcPts val="300"/>
-              </a:spcAft>
-            </a:pPr>
-            <a:r>
-              <a:rPr sz="1550" b="0" i="0">
-                <a:solidFill>
-                  <a:srgbClr val="595959"/>
-                </a:solidFill>
-                <a:latin typeface="Arial"/>
-              </a:rPr>
-              <a:t>A standing forum where the business side and the IT side decide together.</a:t>
-            </a:r>
-          </a:p>
-        </p:txBody>
-      </p:sp>
-      <p:sp>
-        <p:nvSpPr>
-          <p:cNvPr id="12" name="TextBox 11"/>
-          <p:cNvSpPr txBox="1"/>
-          <p:nvPr/>
-        </p:nvSpPr>
-        <p:spPr>
-          <a:xfrm>
-            <a:off x="658368" y="5870448"/>
-            <a:ext cx="10881360" cy="548640"/>
-          </a:xfrm>
-          <a:prstGeom prst="rect">
-            <a:avLst/>
-          </a:prstGeom>
-          <a:noFill/>
-        </p:spPr>
-        <p:txBody>
-          <a:bodyPr wrap="square">
-            <a:spAutoFit/>
-          </a:bodyPr>
-          <a:lstStyle/>
-          <a:p>
-            <a:r>
-              <a:rPr sz="1550" b="1" i="0">
+              <a:rPr sz="2300" b="1" i="0">
                 <a:solidFill>
                   <a:srgbClr val="006E96"/>
                 </a:solidFill>
                 <a:latin typeface="Arial"/>
               </a:rPr>
-              <a:t>Four times a year, and whenever it is urgent, both sides sit down and decide together.</a:t>
-            </a:r>
-          </a:p>
-        </p:txBody>
-      </p:sp>
-      <p:sp>
-        <p:nvSpPr>
-          <p:cNvPr id="13" name="TextBox 12"/>
+              <a:t>Without binding authority you have a discussion group, not a governance board.</a:t>
+            </a:r>
+          </a:p>
+        </p:txBody>
+      </p:sp>
+      <p:sp>
+        <p:nvSpPr>
+          <p:cNvPr id="7" name="TextBox 6"/>
           <p:cNvSpPr txBox="1"/>
           <p:nvPr/>
         </p:nvSpPr>
@@ -14728,6 +12341,1946 @@
       <p:grpSpPr/>
       <p:sp>
         <p:nvSpPr>
+          <p:cNvPr id="2" name="Rectangle 1"/>
+          <p:cNvSpPr/>
+          <p:nvPr/>
+        </p:nvSpPr>
+        <p:spPr>
+          <a:xfrm>
+            <a:off x="457200" y="384048"/>
+            <a:ext cx="45720" cy="256032"/>
+          </a:xfrm>
+          <a:prstGeom prst="rect">
+            <a:avLst/>
+          </a:prstGeom>
+          <a:solidFill>
+            <a:srgbClr val="009CD6"/>
+          </a:solidFill>
+          <a:ln>
+            <a:noFill/>
+          </a:ln>
+          <a:effectLst/>
+        </p:spPr>
+        <p:style>
+          <a:lnRef idx="1">
+            <a:schemeClr val="accent1"/>
+          </a:lnRef>
+          <a:fillRef idx="3">
+            <a:schemeClr val="accent1"/>
+          </a:fillRef>
+          <a:effectRef idx="2">
+            <a:schemeClr val="accent1"/>
+          </a:effectRef>
+          <a:fontRef idx="minor">
+            <a:schemeClr val="lt1"/>
+          </a:fontRef>
+        </p:style>
+        <p:txBody>
+          <a:bodyPr rtlCol="0" anchor="ctr"/>
+          <a:lstStyle/>
+          <a:p>
+            <a:pPr algn="ctr"/>
+          </a:p>
+        </p:txBody>
+      </p:sp>
+      <p:sp>
+        <p:nvSpPr>
+          <p:cNvPr id="3" name="TextBox 2"/>
+          <p:cNvSpPr txBox="1"/>
+          <p:nvPr/>
+        </p:nvSpPr>
+        <p:spPr>
+          <a:xfrm>
+            <a:off x="621792" y="274320"/>
+            <a:ext cx="11247120" cy="914400"/>
+          </a:xfrm>
+          <a:prstGeom prst="rect">
+            <a:avLst/>
+          </a:prstGeom>
+          <a:noFill/>
+        </p:spPr>
+        <p:txBody>
+          <a:bodyPr wrap="square">
+            <a:spAutoFit/>
+          </a:bodyPr>
+          <a:lstStyle/>
+          <a:p>
+            <a:r>
+              <a:rPr sz="2800" b="1" i="0">
+                <a:solidFill>
+                  <a:srgbClr val="1A1A1A"/>
+                </a:solidFill>
+                <a:latin typeface="Arial"/>
+              </a:rPr>
+              <a:t>The chair decides whether the no sticks</a:t>
+            </a:r>
+          </a:p>
+        </p:txBody>
+      </p:sp>
+      <p:sp>
+        <p:nvSpPr>
+          <p:cNvPr id="4" name="TextBox 3"/>
+          <p:cNvSpPr txBox="1"/>
+          <p:nvPr/>
+        </p:nvSpPr>
+        <p:spPr>
+          <a:xfrm>
+            <a:off x="658368" y="1600200"/>
+            <a:ext cx="10881360" cy="2651760"/>
+          </a:xfrm>
+          <a:prstGeom prst="rect">
+            <a:avLst/>
+          </a:prstGeom>
+          <a:noFill/>
+        </p:spPr>
+        <p:txBody>
+          <a:bodyPr wrap="square">
+            <a:spAutoFit/>
+          </a:bodyPr>
+          <a:lstStyle/>
+          <a:p>
+            <a:pPr>
+              <a:spcAft>
+                <a:spcPts val="1200"/>
+              </a:spcAft>
+            </a:pPr>
+            <a:r>
+              <a:rPr sz="2000" b="0" i="0">
+                <a:solidFill>
+                  <a:srgbClr val="1A1A1A"/>
+                </a:solidFill>
+                <a:latin typeface="Arial"/>
+              </a:rPr>
+              <a:t>Your Chief Digitalisation Officer or its equivalent — or, in a smaller government, the minister directly. Senior enough that when the Board declines a powerful ministry’s pet project, the decision holds.</a:t>
+            </a:r>
+          </a:p>
+          <a:p>
+            <a:pPr>
+              <a:spcAft>
+                <a:spcPts val="1200"/>
+              </a:spcAft>
+            </a:pPr>
+            <a:r>
+              <a:rPr sz="2000" b="0" i="0">
+                <a:solidFill>
+                  <a:srgbClr val="1A1A1A"/>
+                </a:solidFill>
+                <a:latin typeface="Arial"/>
+              </a:rPr>
+              <a:t>Note who does not chair it: you. You prepare the Board, you advise it, you bring the analysis.</a:t>
+            </a:r>
+          </a:p>
+        </p:txBody>
+      </p:sp>
+      <p:sp>
+        <p:nvSpPr>
+          <p:cNvPr id="5" name="Rounded Rectangle 4"/>
+          <p:cNvSpPr/>
+          <p:nvPr/>
+        </p:nvSpPr>
+        <p:spPr>
+          <a:xfrm>
+            <a:off x="658368" y="4434840"/>
+            <a:ext cx="10881360" cy="1325880"/>
+          </a:xfrm>
+          <a:prstGeom prst="roundRect">
+            <a:avLst>
+              <a:gd name="adj" fmla="val 4500"/>
+            </a:avLst>
+          </a:prstGeom>
+          <a:solidFill>
+            <a:srgbClr val="E5F5FB"/>
+          </a:solidFill>
+          <a:ln>
+            <a:noFill/>
+          </a:ln>
+          <a:effectLst/>
+        </p:spPr>
+        <p:style>
+          <a:lnRef idx="1">
+            <a:schemeClr val="accent1"/>
+          </a:lnRef>
+          <a:fillRef idx="3">
+            <a:schemeClr val="accent1"/>
+          </a:fillRef>
+          <a:effectRef idx="2">
+            <a:schemeClr val="accent1"/>
+          </a:effectRef>
+          <a:fontRef idx="minor">
+            <a:schemeClr val="lt1"/>
+          </a:fontRef>
+        </p:style>
+        <p:txBody>
+          <a:bodyPr rtlCol="0" anchor="ctr"/>
+          <a:lstStyle/>
+          <a:p>
+            <a:pPr algn="ctr"/>
+          </a:p>
+        </p:txBody>
+      </p:sp>
+      <p:sp>
+        <p:nvSpPr>
+          <p:cNvPr id="6" name="TextBox 5"/>
+          <p:cNvSpPr txBox="1"/>
+          <p:nvPr/>
+        </p:nvSpPr>
+        <p:spPr>
+          <a:xfrm>
+            <a:off x="859536" y="4626864"/>
+            <a:ext cx="10479024" cy="1051560"/>
+          </a:xfrm>
+          <a:prstGeom prst="rect">
+            <a:avLst/>
+          </a:prstGeom>
+          <a:noFill/>
+        </p:spPr>
+        <p:txBody>
+          <a:bodyPr wrap="square">
+            <a:spAutoFit/>
+          </a:bodyPr>
+          <a:lstStyle/>
+          <a:p>
+            <a:pPr>
+              <a:spcAft>
+                <a:spcPts val="700"/>
+              </a:spcAft>
+            </a:pPr>
+            <a:r>
+              <a:rPr sz="2300" b="1" i="0">
+                <a:solidFill>
+                  <a:srgbClr val="006E96"/>
+                </a:solidFill>
+                <a:latin typeface="Arial"/>
+              </a:rPr>
+              <a:t>The architect informs; the chair decides.</a:t>
+            </a:r>
+          </a:p>
+        </p:txBody>
+      </p:sp>
+      <p:sp>
+        <p:nvSpPr>
+          <p:cNvPr id="7" name="TextBox 6"/>
+          <p:cNvSpPr txBox="1"/>
+          <p:nvPr/>
+        </p:nvSpPr>
+        <p:spPr>
+          <a:xfrm>
+            <a:off x="457200" y="6473952"/>
+            <a:ext cx="7772400" cy="292608"/>
+          </a:xfrm>
+          <a:prstGeom prst="rect">
+            <a:avLst/>
+          </a:prstGeom>
+          <a:noFill/>
+        </p:spPr>
+        <p:txBody>
+          <a:bodyPr wrap="square">
+            <a:spAutoFit/>
+          </a:bodyPr>
+          <a:lstStyle/>
+          <a:p>
+            <a:r>
+              <a:rPr sz="900" b="0" i="0">
+                <a:solidFill>
+                  <a:srgbClr val="595959"/>
+                </a:solidFill>
+                <a:latin typeface="Arial"/>
+              </a:rPr>
+              <a:t>3.4 · Stand up an EA Board that can actually say no</a:t>
+            </a:r>
+          </a:p>
+        </p:txBody>
+      </p:sp>
+    </p:spTree>
+  </p:cSld>
+  <p:clrMapOvr>
+    <a:masterClrMapping/>
+  </p:clrMapOvr>
+</p:sld>
+</file>
+
+<file path=ppt/slides/slide33.xml><?xml version="1.0" encoding="utf-8"?>
+<p:sld xmlns:a="http://schemas.openxmlformats.org/drawingml/2006/main" xmlns:p="http://schemas.openxmlformats.org/presentationml/2006/main" xmlns:r="http://schemas.openxmlformats.org/officeDocument/2006/relationships">
+  <p:cSld>
+    <p:spTree>
+      <p:nvGrpSpPr>
+        <p:cNvPr id="1" name=""/>
+        <p:cNvGrpSpPr/>
+        <p:nvPr/>
+      </p:nvGrpSpPr>
+      <p:grpSpPr/>
+      <p:sp>
+        <p:nvSpPr>
+          <p:cNvPr id="2" name="Rectangle 1"/>
+          <p:cNvSpPr/>
+          <p:nvPr/>
+        </p:nvSpPr>
+        <p:spPr>
+          <a:xfrm>
+            <a:off x="457200" y="384048"/>
+            <a:ext cx="45720" cy="256032"/>
+          </a:xfrm>
+          <a:prstGeom prst="rect">
+            <a:avLst/>
+          </a:prstGeom>
+          <a:solidFill>
+            <a:srgbClr val="009CD6"/>
+          </a:solidFill>
+          <a:ln>
+            <a:noFill/>
+          </a:ln>
+          <a:effectLst/>
+        </p:spPr>
+        <p:style>
+          <a:lnRef idx="1">
+            <a:schemeClr val="accent1"/>
+          </a:lnRef>
+          <a:fillRef idx="3">
+            <a:schemeClr val="accent1"/>
+          </a:fillRef>
+          <a:effectRef idx="2">
+            <a:schemeClr val="accent1"/>
+          </a:effectRef>
+          <a:fontRef idx="minor">
+            <a:schemeClr val="lt1"/>
+          </a:fontRef>
+        </p:style>
+        <p:txBody>
+          <a:bodyPr rtlCol="0" anchor="ctr"/>
+          <a:lstStyle/>
+          <a:p>
+            <a:pPr algn="ctr"/>
+          </a:p>
+        </p:txBody>
+      </p:sp>
+      <p:sp>
+        <p:nvSpPr>
+          <p:cNvPr id="3" name="TextBox 2"/>
+          <p:cNvSpPr txBox="1"/>
+          <p:nvPr/>
+        </p:nvSpPr>
+        <p:spPr>
+          <a:xfrm>
+            <a:off x="621792" y="274320"/>
+            <a:ext cx="11247120" cy="914400"/>
+          </a:xfrm>
+          <a:prstGeom prst="rect">
+            <a:avLst/>
+          </a:prstGeom>
+          <a:noFill/>
+        </p:spPr>
+        <p:txBody>
+          <a:bodyPr wrap="square">
+            <a:spAutoFit/>
+          </a:bodyPr>
+          <a:lstStyle/>
+          <a:p>
+            <a:r>
+              <a:rPr sz="2800" b="1" i="0">
+                <a:solidFill>
+                  <a:srgbClr val="1A1A1A"/>
+                </a:solidFill>
+                <a:latin typeface="Arial"/>
+              </a:rPr>
+              <a:t>Membership follows the affected systems, not convenience</a:t>
+            </a:r>
+          </a:p>
+        </p:txBody>
+      </p:sp>
+      <p:sp>
+        <p:nvSpPr>
+          <p:cNvPr id="4" name="Oval 3"/>
+          <p:cNvSpPr/>
+          <p:nvPr/>
+        </p:nvSpPr>
+        <p:spPr>
+          <a:xfrm>
+            <a:off x="621792" y="1508760"/>
+            <a:ext cx="310896" cy="310896"/>
+          </a:xfrm>
+          <a:prstGeom prst="ellipse">
+            <a:avLst/>
+          </a:prstGeom>
+          <a:solidFill>
+            <a:srgbClr val="009CD6"/>
+          </a:solidFill>
+          <a:ln>
+            <a:noFill/>
+          </a:ln>
+          <a:effectLst/>
+        </p:spPr>
+        <p:style>
+          <a:lnRef idx="1">
+            <a:schemeClr val="accent1"/>
+          </a:lnRef>
+          <a:fillRef idx="3">
+            <a:schemeClr val="accent1"/>
+          </a:fillRef>
+          <a:effectRef idx="2">
+            <a:schemeClr val="accent1"/>
+          </a:effectRef>
+          <a:fontRef idx="minor">
+            <a:schemeClr val="lt1"/>
+          </a:fontRef>
+        </p:style>
+        <p:txBody>
+          <a:bodyPr rtlCol="0" anchor="ctr" lIns="0" rIns="0" tIns="0" bIns="0" wrap="square"/>
+          <a:lstStyle/>
+          <a:p>
+            <a:pPr algn="ctr"/>
+            <a:r>
+              <a:rPr sz="1300" b="1" i="0">
+                <a:solidFill>
+                  <a:srgbClr val="FFFFFF"/>
+                </a:solidFill>
+                <a:latin typeface="Arial"/>
+              </a:rPr>
+              <a:t>1</a:t>
+            </a:r>
+          </a:p>
+        </p:txBody>
+      </p:sp>
+      <p:sp>
+        <p:nvSpPr>
+          <p:cNvPr id="5" name="TextBox 4"/>
+          <p:cNvSpPr txBox="1"/>
+          <p:nvPr/>
+        </p:nvSpPr>
+        <p:spPr>
+          <a:xfrm>
+            <a:off x="1115568" y="1463040"/>
+            <a:ext cx="10527487" cy="1028699"/>
+          </a:xfrm>
+          <a:prstGeom prst="rect">
+            <a:avLst/>
+          </a:prstGeom>
+          <a:noFill/>
+        </p:spPr>
+        <p:txBody>
+          <a:bodyPr wrap="square">
+            <a:spAutoFit/>
+          </a:bodyPr>
+          <a:lstStyle/>
+          <a:p>
+            <a:pPr>
+              <a:spcAft>
+                <a:spcPts val="300"/>
+              </a:spcAft>
+            </a:pPr>
+            <a:r>
+              <a:rPr sz="1900" b="1" i="0">
+                <a:solidFill>
+                  <a:srgbClr val="1A1A1A"/>
+                </a:solidFill>
+                <a:latin typeface="Arial"/>
+              </a:rPr>
+              <a:t>The sector ministry CIOs</a:t>
+            </a:r>
+          </a:p>
+          <a:p>
+            <a:pPr>
+              <a:spcAft>
+                <a:spcPts val="300"/>
+              </a:spcAft>
+            </a:pPr>
+            <a:r>
+              <a:rPr sz="1550" b="0" i="0">
+                <a:solidFill>
+                  <a:srgbClr val="595959"/>
+                </a:solidFill>
+                <a:latin typeface="Arial"/>
+              </a:rPr>
+              <a:t>Their systems carry the decisions.</a:t>
+            </a:r>
+          </a:p>
+        </p:txBody>
+      </p:sp>
+      <p:sp>
+        <p:nvSpPr>
+          <p:cNvPr id="6" name="Rectangle 5"/>
+          <p:cNvSpPr/>
+          <p:nvPr/>
+        </p:nvSpPr>
+        <p:spPr>
+          <a:xfrm>
+            <a:off x="621792" y="2496312"/>
+            <a:ext cx="10881360" cy="12700"/>
+          </a:xfrm>
+          <a:prstGeom prst="rect">
+            <a:avLst/>
+          </a:prstGeom>
+          <a:solidFill>
+            <a:srgbClr val="DDECF4"/>
+          </a:solidFill>
+          <a:ln>
+            <a:noFill/>
+          </a:ln>
+          <a:effectLst/>
+        </p:spPr>
+        <p:style>
+          <a:lnRef idx="1">
+            <a:schemeClr val="accent1"/>
+          </a:lnRef>
+          <a:fillRef idx="3">
+            <a:schemeClr val="accent1"/>
+          </a:fillRef>
+          <a:effectRef idx="2">
+            <a:schemeClr val="accent1"/>
+          </a:effectRef>
+          <a:fontRef idx="minor">
+            <a:schemeClr val="lt1"/>
+          </a:fontRef>
+        </p:style>
+        <p:txBody>
+          <a:bodyPr rtlCol="0" anchor="ctr"/>
+          <a:lstStyle/>
+          <a:p>
+            <a:pPr algn="ctr"/>
+          </a:p>
+        </p:txBody>
+      </p:sp>
+      <p:sp>
+        <p:nvSpPr>
+          <p:cNvPr id="7" name="Oval 6"/>
+          <p:cNvSpPr/>
+          <p:nvPr/>
+        </p:nvSpPr>
+        <p:spPr>
+          <a:xfrm>
+            <a:off x="621792" y="2583179"/>
+            <a:ext cx="310896" cy="310896"/>
+          </a:xfrm>
+          <a:prstGeom prst="ellipse">
+            <a:avLst/>
+          </a:prstGeom>
+          <a:solidFill>
+            <a:srgbClr val="009CD6"/>
+          </a:solidFill>
+          <a:ln>
+            <a:noFill/>
+          </a:ln>
+          <a:effectLst/>
+        </p:spPr>
+        <p:style>
+          <a:lnRef idx="1">
+            <a:schemeClr val="accent1"/>
+          </a:lnRef>
+          <a:fillRef idx="3">
+            <a:schemeClr val="accent1"/>
+          </a:fillRef>
+          <a:effectRef idx="2">
+            <a:schemeClr val="accent1"/>
+          </a:effectRef>
+          <a:fontRef idx="minor">
+            <a:schemeClr val="lt1"/>
+          </a:fontRef>
+        </p:style>
+        <p:txBody>
+          <a:bodyPr rtlCol="0" anchor="ctr" lIns="0" rIns="0" tIns="0" bIns="0" wrap="square"/>
+          <a:lstStyle/>
+          <a:p>
+            <a:pPr algn="ctr"/>
+            <a:r>
+              <a:rPr sz="1300" b="1" i="0">
+                <a:solidFill>
+                  <a:srgbClr val="FFFFFF"/>
+                </a:solidFill>
+                <a:latin typeface="Arial"/>
+              </a:rPr>
+              <a:t>2</a:t>
+            </a:r>
+          </a:p>
+        </p:txBody>
+      </p:sp>
+      <p:sp>
+        <p:nvSpPr>
+          <p:cNvPr id="8" name="TextBox 7"/>
+          <p:cNvSpPr txBox="1"/>
+          <p:nvPr/>
+        </p:nvSpPr>
+        <p:spPr>
+          <a:xfrm>
+            <a:off x="1115568" y="2537460"/>
+            <a:ext cx="10527487" cy="1028699"/>
+          </a:xfrm>
+          <a:prstGeom prst="rect">
+            <a:avLst/>
+          </a:prstGeom>
+          <a:noFill/>
+        </p:spPr>
+        <p:txBody>
+          <a:bodyPr wrap="square">
+            <a:spAutoFit/>
+          </a:bodyPr>
+          <a:lstStyle/>
+          <a:p>
+            <a:pPr>
+              <a:spcAft>
+                <a:spcPts val="300"/>
+              </a:spcAft>
+            </a:pPr>
+            <a:r>
+              <a:rPr sz="1900" b="1" i="0">
+                <a:solidFill>
+                  <a:srgbClr val="1A1A1A"/>
+                </a:solidFill>
+                <a:latin typeface="Arial"/>
+              </a:rPr>
+              <a:t>The owners of the major state registries</a:t>
+            </a:r>
+          </a:p>
+          <a:p>
+            <a:pPr>
+              <a:spcAft>
+                <a:spcPts val="300"/>
+              </a:spcAft>
+            </a:pPr>
+            <a:r>
+              <a:rPr sz="1550" b="0" i="0">
+                <a:solidFill>
+                  <a:srgbClr val="595959"/>
+                </a:solidFill>
+                <a:latin typeface="Arial"/>
+              </a:rPr>
+              <a:t>The identity authority, the population register.</a:t>
+            </a:r>
+          </a:p>
+        </p:txBody>
+      </p:sp>
+      <p:sp>
+        <p:nvSpPr>
+          <p:cNvPr id="9" name="Rectangle 8"/>
+          <p:cNvSpPr/>
+          <p:nvPr/>
+        </p:nvSpPr>
+        <p:spPr>
+          <a:xfrm>
+            <a:off x="621792" y="3570732"/>
+            <a:ext cx="10881360" cy="12700"/>
+          </a:xfrm>
+          <a:prstGeom prst="rect">
+            <a:avLst/>
+          </a:prstGeom>
+          <a:solidFill>
+            <a:srgbClr val="DDECF4"/>
+          </a:solidFill>
+          <a:ln>
+            <a:noFill/>
+          </a:ln>
+          <a:effectLst/>
+        </p:spPr>
+        <p:style>
+          <a:lnRef idx="1">
+            <a:schemeClr val="accent1"/>
+          </a:lnRef>
+          <a:fillRef idx="3">
+            <a:schemeClr val="accent1"/>
+          </a:fillRef>
+          <a:effectRef idx="2">
+            <a:schemeClr val="accent1"/>
+          </a:effectRef>
+          <a:fontRef idx="minor">
+            <a:schemeClr val="lt1"/>
+          </a:fontRef>
+        </p:style>
+        <p:txBody>
+          <a:bodyPr rtlCol="0" anchor="ctr"/>
+          <a:lstStyle/>
+          <a:p>
+            <a:pPr algn="ctr"/>
+          </a:p>
+        </p:txBody>
+      </p:sp>
+      <p:sp>
+        <p:nvSpPr>
+          <p:cNvPr id="10" name="Oval 9"/>
+          <p:cNvSpPr/>
+          <p:nvPr/>
+        </p:nvSpPr>
+        <p:spPr>
+          <a:xfrm>
+            <a:off x="621792" y="3657599"/>
+            <a:ext cx="310896" cy="310896"/>
+          </a:xfrm>
+          <a:prstGeom prst="ellipse">
+            <a:avLst/>
+          </a:prstGeom>
+          <a:solidFill>
+            <a:srgbClr val="009CD6"/>
+          </a:solidFill>
+          <a:ln>
+            <a:noFill/>
+          </a:ln>
+          <a:effectLst/>
+        </p:spPr>
+        <p:style>
+          <a:lnRef idx="1">
+            <a:schemeClr val="accent1"/>
+          </a:lnRef>
+          <a:fillRef idx="3">
+            <a:schemeClr val="accent1"/>
+          </a:fillRef>
+          <a:effectRef idx="2">
+            <a:schemeClr val="accent1"/>
+          </a:effectRef>
+          <a:fontRef idx="minor">
+            <a:schemeClr val="lt1"/>
+          </a:fontRef>
+        </p:style>
+        <p:txBody>
+          <a:bodyPr rtlCol="0" anchor="ctr" lIns="0" rIns="0" tIns="0" bIns="0" wrap="square"/>
+          <a:lstStyle/>
+          <a:p>
+            <a:pPr algn="ctr"/>
+            <a:r>
+              <a:rPr sz="1300" b="1" i="0">
+                <a:solidFill>
+                  <a:srgbClr val="FFFFFF"/>
+                </a:solidFill>
+                <a:latin typeface="Arial"/>
+              </a:rPr>
+              <a:t>3</a:t>
+            </a:r>
+          </a:p>
+        </p:txBody>
+      </p:sp>
+      <p:sp>
+        <p:nvSpPr>
+          <p:cNvPr id="11" name="TextBox 10"/>
+          <p:cNvSpPr txBox="1"/>
+          <p:nvPr/>
+        </p:nvSpPr>
+        <p:spPr>
+          <a:xfrm>
+            <a:off x="1115568" y="3611879"/>
+            <a:ext cx="10527487" cy="1028699"/>
+          </a:xfrm>
+          <a:prstGeom prst="rect">
+            <a:avLst/>
+          </a:prstGeom>
+          <a:noFill/>
+        </p:spPr>
+        <p:txBody>
+          <a:bodyPr wrap="square">
+            <a:spAutoFit/>
+          </a:bodyPr>
+          <a:lstStyle/>
+          <a:p>
+            <a:pPr>
+              <a:spcAft>
+                <a:spcPts val="300"/>
+              </a:spcAft>
+            </a:pPr>
+            <a:r>
+              <a:rPr sz="1900" b="1" i="0">
+                <a:solidFill>
+                  <a:srgbClr val="1A1A1A"/>
+                </a:solidFill>
+                <a:latin typeface="Arial"/>
+              </a:rPr>
+              <a:t>The data-protection regulator</a:t>
+            </a:r>
+          </a:p>
+          <a:p>
+            <a:pPr>
+              <a:spcAft>
+                <a:spcPts val="300"/>
+              </a:spcAft>
+            </a:pPr>
+            <a:r>
+              <a:rPr sz="1550" b="0" i="0">
+                <a:solidFill>
+                  <a:srgbClr val="595959"/>
+                </a:solidFill>
+                <a:latin typeface="Arial"/>
+              </a:rPr>
+              <a:t>Wherever data-sharing is in play.</a:t>
+            </a:r>
+          </a:p>
+        </p:txBody>
+      </p:sp>
+      <p:sp>
+        <p:nvSpPr>
+          <p:cNvPr id="12" name="Rectangle 11"/>
+          <p:cNvSpPr/>
+          <p:nvPr/>
+        </p:nvSpPr>
+        <p:spPr>
+          <a:xfrm>
+            <a:off x="621792" y="4645152"/>
+            <a:ext cx="10881360" cy="12700"/>
+          </a:xfrm>
+          <a:prstGeom prst="rect">
+            <a:avLst/>
+          </a:prstGeom>
+          <a:solidFill>
+            <a:srgbClr val="DDECF4"/>
+          </a:solidFill>
+          <a:ln>
+            <a:noFill/>
+          </a:ln>
+          <a:effectLst/>
+        </p:spPr>
+        <p:style>
+          <a:lnRef idx="1">
+            <a:schemeClr val="accent1"/>
+          </a:lnRef>
+          <a:fillRef idx="3">
+            <a:schemeClr val="accent1"/>
+          </a:fillRef>
+          <a:effectRef idx="2">
+            <a:schemeClr val="accent1"/>
+          </a:effectRef>
+          <a:fontRef idx="minor">
+            <a:schemeClr val="lt1"/>
+          </a:fontRef>
+        </p:style>
+        <p:txBody>
+          <a:bodyPr rtlCol="0" anchor="ctr"/>
+          <a:lstStyle/>
+          <a:p>
+            <a:pPr algn="ctr"/>
+          </a:p>
+        </p:txBody>
+      </p:sp>
+      <p:sp>
+        <p:nvSpPr>
+          <p:cNvPr id="13" name="Oval 12"/>
+          <p:cNvSpPr/>
+          <p:nvPr/>
+        </p:nvSpPr>
+        <p:spPr>
+          <a:xfrm>
+            <a:off x="621792" y="4732020"/>
+            <a:ext cx="310896" cy="310896"/>
+          </a:xfrm>
+          <a:prstGeom prst="ellipse">
+            <a:avLst/>
+          </a:prstGeom>
+          <a:solidFill>
+            <a:srgbClr val="009CD6"/>
+          </a:solidFill>
+          <a:ln>
+            <a:noFill/>
+          </a:ln>
+          <a:effectLst/>
+        </p:spPr>
+        <p:style>
+          <a:lnRef idx="1">
+            <a:schemeClr val="accent1"/>
+          </a:lnRef>
+          <a:fillRef idx="3">
+            <a:schemeClr val="accent1"/>
+          </a:fillRef>
+          <a:effectRef idx="2">
+            <a:schemeClr val="accent1"/>
+          </a:effectRef>
+          <a:fontRef idx="minor">
+            <a:schemeClr val="lt1"/>
+          </a:fontRef>
+        </p:style>
+        <p:txBody>
+          <a:bodyPr rtlCol="0" anchor="ctr" lIns="0" rIns="0" tIns="0" bIns="0" wrap="square"/>
+          <a:lstStyle/>
+          <a:p>
+            <a:pPr algn="ctr"/>
+            <a:r>
+              <a:rPr sz="1300" b="1" i="0">
+                <a:solidFill>
+                  <a:srgbClr val="FFFFFF"/>
+                </a:solidFill>
+                <a:latin typeface="Arial"/>
+              </a:rPr>
+              <a:t>4</a:t>
+            </a:r>
+          </a:p>
+        </p:txBody>
+      </p:sp>
+      <p:sp>
+        <p:nvSpPr>
+          <p:cNvPr id="14" name="TextBox 13"/>
+          <p:cNvSpPr txBox="1"/>
+          <p:nvPr/>
+        </p:nvSpPr>
+        <p:spPr>
+          <a:xfrm>
+            <a:off x="1115568" y="4686300"/>
+            <a:ext cx="10527487" cy="1028699"/>
+          </a:xfrm>
+          <a:prstGeom prst="rect">
+            <a:avLst/>
+          </a:prstGeom>
+          <a:noFill/>
+        </p:spPr>
+        <p:txBody>
+          <a:bodyPr wrap="square">
+            <a:spAutoFit/>
+          </a:bodyPr>
+          <a:lstStyle/>
+          <a:p>
+            <a:pPr>
+              <a:spcAft>
+                <a:spcPts val="300"/>
+              </a:spcAft>
+            </a:pPr>
+            <a:r>
+              <a:rPr sz="1900" b="1" i="0">
+                <a:solidFill>
+                  <a:srgbClr val="1A1A1A"/>
+                </a:solidFill>
+                <a:latin typeface="Arial"/>
+              </a:rPr>
+              <a:t>One external advisor</a:t>
+            </a:r>
+          </a:p>
+          <a:p>
+            <a:pPr>
+              <a:spcAft>
+                <a:spcPts val="300"/>
+              </a:spcAft>
+            </a:pPr>
+            <a:r>
+              <a:rPr sz="1550" b="0" i="0">
+                <a:solidFill>
+                  <a:srgbClr val="595959"/>
+                </a:solidFill>
+                <a:latin typeface="Arial"/>
+              </a:rPr>
+              <a:t>Where an outside perspective is useful.</a:t>
+            </a:r>
+          </a:p>
+        </p:txBody>
+      </p:sp>
+      <p:sp>
+        <p:nvSpPr>
+          <p:cNvPr id="15" name="TextBox 14"/>
+          <p:cNvSpPr txBox="1"/>
+          <p:nvPr/>
+        </p:nvSpPr>
+        <p:spPr>
+          <a:xfrm>
+            <a:off x="658368" y="5870448"/>
+            <a:ext cx="10881360" cy="548640"/>
+          </a:xfrm>
+          <a:prstGeom prst="rect">
+            <a:avLst/>
+          </a:prstGeom>
+          <a:noFill/>
+        </p:spPr>
+        <p:txBody>
+          <a:bodyPr wrap="square">
+            <a:spAutoFit/>
+          </a:bodyPr>
+          <a:lstStyle/>
+          <a:p>
+            <a:r>
+              <a:rPr sz="1550" b="1" i="0">
+                <a:solidFill>
+                  <a:srgbClr val="006E96"/>
+                </a:solidFill>
+                <a:latin typeface="Arial"/>
+              </a:rPr>
+              <a:t>A Board of the right twelve is better than a Board of the convenient forty.</a:t>
+            </a:r>
+          </a:p>
+        </p:txBody>
+      </p:sp>
+      <p:sp>
+        <p:nvSpPr>
+          <p:cNvPr id="16" name="TextBox 15"/>
+          <p:cNvSpPr txBox="1"/>
+          <p:nvPr/>
+        </p:nvSpPr>
+        <p:spPr>
+          <a:xfrm>
+            <a:off x="457200" y="6473952"/>
+            <a:ext cx="7772400" cy="292608"/>
+          </a:xfrm>
+          <a:prstGeom prst="rect">
+            <a:avLst/>
+          </a:prstGeom>
+          <a:noFill/>
+        </p:spPr>
+        <p:txBody>
+          <a:bodyPr wrap="square">
+            <a:spAutoFit/>
+          </a:bodyPr>
+          <a:lstStyle/>
+          <a:p>
+            <a:r>
+              <a:rPr sz="900" b="0" i="0">
+                <a:solidFill>
+                  <a:srgbClr val="595959"/>
+                </a:solidFill>
+                <a:latin typeface="Arial"/>
+              </a:rPr>
+              <a:t>3.4 · Stand up an EA Board that can actually say no</a:t>
+            </a:r>
+          </a:p>
+        </p:txBody>
+      </p:sp>
+    </p:spTree>
+  </p:cSld>
+  <p:clrMapOvr>
+    <a:masterClrMapping/>
+  </p:clrMapOvr>
+</p:sld>
+</file>
+
+<file path=ppt/slides/slide34.xml><?xml version="1.0" encoding="utf-8"?>
+<p:sld xmlns:a="http://schemas.openxmlformats.org/drawingml/2006/main" xmlns:p="http://schemas.openxmlformats.org/presentationml/2006/main" xmlns:r="http://schemas.openxmlformats.org/officeDocument/2006/relationships">
+  <p:cSld>
+    <p:spTree>
+      <p:nvGrpSpPr>
+        <p:cNvPr id="1" name=""/>
+        <p:cNvGrpSpPr/>
+        <p:nvPr/>
+      </p:nvGrpSpPr>
+      <p:grpSpPr/>
+      <p:sp>
+        <p:nvSpPr>
+          <p:cNvPr id="2" name="Rectangle 1"/>
+          <p:cNvSpPr/>
+          <p:nvPr/>
+        </p:nvSpPr>
+        <p:spPr>
+          <a:xfrm>
+            <a:off x="457200" y="384048"/>
+            <a:ext cx="45720" cy="256032"/>
+          </a:xfrm>
+          <a:prstGeom prst="rect">
+            <a:avLst/>
+          </a:prstGeom>
+          <a:solidFill>
+            <a:srgbClr val="009CD6"/>
+          </a:solidFill>
+          <a:ln>
+            <a:noFill/>
+          </a:ln>
+          <a:effectLst/>
+        </p:spPr>
+        <p:style>
+          <a:lnRef idx="1">
+            <a:schemeClr val="accent1"/>
+          </a:lnRef>
+          <a:fillRef idx="3">
+            <a:schemeClr val="accent1"/>
+          </a:fillRef>
+          <a:effectRef idx="2">
+            <a:schemeClr val="accent1"/>
+          </a:effectRef>
+          <a:fontRef idx="minor">
+            <a:schemeClr val="lt1"/>
+          </a:fontRef>
+        </p:style>
+        <p:txBody>
+          <a:bodyPr rtlCol="0" anchor="ctr"/>
+          <a:lstStyle/>
+          <a:p>
+            <a:pPr algn="ctr"/>
+          </a:p>
+        </p:txBody>
+      </p:sp>
+      <p:sp>
+        <p:nvSpPr>
+          <p:cNvPr id="3" name="TextBox 2"/>
+          <p:cNvSpPr txBox="1"/>
+          <p:nvPr/>
+        </p:nvSpPr>
+        <p:spPr>
+          <a:xfrm>
+            <a:off x="621792" y="274320"/>
+            <a:ext cx="11247120" cy="914400"/>
+          </a:xfrm>
+          <a:prstGeom prst="rect">
+            <a:avLst/>
+          </a:prstGeom>
+          <a:noFill/>
+        </p:spPr>
+        <p:txBody>
+          <a:bodyPr wrap="square">
+            <a:spAutoFit/>
+          </a:bodyPr>
+          <a:lstStyle/>
+          <a:p>
+            <a:r>
+              <a:rPr sz="2800" b="1" i="0">
+                <a:solidFill>
+                  <a:srgbClr val="1A1A1A"/>
+                </a:solidFill>
+                <a:latin typeface="Arial"/>
+              </a:rPr>
+              <a:t>Govern on a cadence that does not become the bottleneck</a:t>
+            </a:r>
+          </a:p>
+        </p:txBody>
+      </p:sp>
+      <p:sp>
+        <p:nvSpPr>
+          <p:cNvPr id="4" name="Rounded Rectangle 3"/>
+          <p:cNvSpPr/>
+          <p:nvPr/>
+        </p:nvSpPr>
+        <p:spPr>
+          <a:xfrm>
+            <a:off x="658368" y="1554480"/>
+            <a:ext cx="5394960" cy="3977639"/>
+          </a:xfrm>
+          <a:prstGeom prst="roundRect">
+            <a:avLst>
+              <a:gd name="adj" fmla="val 4500"/>
+            </a:avLst>
+          </a:prstGeom>
+          <a:solidFill>
+            <a:srgbClr val="E5F5FB"/>
+          </a:solidFill>
+          <a:ln>
+            <a:noFill/>
+          </a:ln>
+          <a:effectLst/>
+        </p:spPr>
+        <p:style>
+          <a:lnRef idx="1">
+            <a:schemeClr val="accent1"/>
+          </a:lnRef>
+          <a:fillRef idx="3">
+            <a:schemeClr val="accent1"/>
+          </a:fillRef>
+          <a:effectRef idx="2">
+            <a:schemeClr val="accent1"/>
+          </a:effectRef>
+          <a:fontRef idx="minor">
+            <a:schemeClr val="lt1"/>
+          </a:fontRef>
+        </p:style>
+        <p:txBody>
+          <a:bodyPr rtlCol="0" anchor="ctr"/>
+          <a:lstStyle/>
+          <a:p>
+            <a:pPr algn="ctr"/>
+          </a:p>
+        </p:txBody>
+      </p:sp>
+      <p:sp>
+        <p:nvSpPr>
+          <p:cNvPr id="5" name="TextBox 4"/>
+          <p:cNvSpPr txBox="1"/>
+          <p:nvPr/>
+        </p:nvSpPr>
+        <p:spPr>
+          <a:xfrm>
+            <a:off x="859536" y="1700784"/>
+            <a:ext cx="4992624" cy="3703320"/>
+          </a:xfrm>
+          <a:prstGeom prst="rect">
+            <a:avLst/>
+          </a:prstGeom>
+          <a:noFill/>
+        </p:spPr>
+        <p:txBody>
+          <a:bodyPr wrap="square">
+            <a:spAutoFit/>
+          </a:bodyPr>
+          <a:lstStyle/>
+          <a:p>
+            <a:pPr>
+              <a:spcAft>
+                <a:spcPts val="700"/>
+              </a:spcAft>
+            </a:pPr>
+            <a:r>
+              <a:rPr sz="1900" b="1" i="0">
+                <a:solidFill>
+                  <a:srgbClr val="006E96"/>
+                </a:solidFill>
+                <a:latin typeface="Arial"/>
+              </a:rPr>
+              <a:t>QUARTERLY — THE MAIN MEETING</a:t>
+            </a:r>
+          </a:p>
+          <a:p>
+            <a:pPr>
+              <a:spcAft>
+                <a:spcPts val="700"/>
+              </a:spcAft>
+            </a:pPr>
+            <a:r>
+              <a:rPr sz="1600" b="0" i="0">
+                <a:solidFill>
+                  <a:srgbClr val="1A1A1A"/>
+                </a:solidFill>
+                <a:latin typeface="Arial"/>
+              </a:rPr>
+              <a:t>Review the architecture as a whole.</a:t>
+            </a:r>
+          </a:p>
+          <a:p>
+            <a:pPr>
+              <a:spcAft>
+                <a:spcPts val="700"/>
+              </a:spcAft>
+            </a:pPr>
+            <a:r>
+              <a:rPr sz="1600" b="0" i="0">
+                <a:solidFill>
+                  <a:srgbClr val="1A1A1A"/>
+                </a:solidFill>
+                <a:latin typeface="Arial"/>
+              </a:rPr>
+              <a:t>What changed, what is drifting, what to prioritise next.</a:t>
+            </a:r>
+          </a:p>
+        </p:txBody>
+      </p:sp>
+      <p:sp>
+        <p:nvSpPr>
+          <p:cNvPr id="6" name="Rounded Rectangle 5"/>
+          <p:cNvSpPr/>
+          <p:nvPr/>
+        </p:nvSpPr>
+        <p:spPr>
+          <a:xfrm>
+            <a:off x="6263640" y="1554480"/>
+            <a:ext cx="5394960" cy="3977639"/>
+          </a:xfrm>
+          <a:prstGeom prst="roundRect">
+            <a:avLst>
+              <a:gd name="adj" fmla="val 4500"/>
+            </a:avLst>
+          </a:prstGeom>
+          <a:solidFill>
+            <a:srgbClr val="F2F2F2"/>
+          </a:solidFill>
+          <a:ln>
+            <a:noFill/>
+          </a:ln>
+          <a:effectLst/>
+        </p:spPr>
+        <p:style>
+          <a:lnRef idx="1">
+            <a:schemeClr val="accent1"/>
+          </a:lnRef>
+          <a:fillRef idx="3">
+            <a:schemeClr val="accent1"/>
+          </a:fillRef>
+          <a:effectRef idx="2">
+            <a:schemeClr val="accent1"/>
+          </a:effectRef>
+          <a:fontRef idx="minor">
+            <a:schemeClr val="lt1"/>
+          </a:fontRef>
+        </p:style>
+        <p:txBody>
+          <a:bodyPr rtlCol="0" anchor="ctr"/>
+          <a:lstStyle/>
+          <a:p>
+            <a:pPr algn="ctr"/>
+          </a:p>
+        </p:txBody>
+      </p:sp>
+      <p:sp>
+        <p:nvSpPr>
+          <p:cNvPr id="7" name="TextBox 6"/>
+          <p:cNvSpPr txBox="1"/>
+          <p:nvPr/>
+        </p:nvSpPr>
+        <p:spPr>
+          <a:xfrm>
+            <a:off x="6464808" y="1700784"/>
+            <a:ext cx="4992624" cy="3703320"/>
+          </a:xfrm>
+          <a:prstGeom prst="rect">
+            <a:avLst/>
+          </a:prstGeom>
+          <a:noFill/>
+        </p:spPr>
+        <p:txBody>
+          <a:bodyPr wrap="square">
+            <a:spAutoFit/>
+          </a:bodyPr>
+          <a:lstStyle/>
+          <a:p>
+            <a:pPr>
+              <a:spcAft>
+                <a:spcPts val="700"/>
+              </a:spcAft>
+            </a:pPr>
+            <a:r>
+              <a:rPr sz="1900" b="1" i="0">
+                <a:solidFill>
+                  <a:srgbClr val="006E96"/>
+                </a:solidFill>
+                <a:latin typeface="Arial"/>
+              </a:rPr>
+              <a:t>AD HOC — THE FAST PATH</a:t>
+            </a:r>
+          </a:p>
+          <a:p>
+            <a:pPr>
+              <a:spcAft>
+                <a:spcPts val="700"/>
+              </a:spcAft>
+            </a:pPr>
+            <a:r>
+              <a:rPr sz="1600" b="0" i="0">
+                <a:solidFill>
+                  <a:srgbClr val="1A1A1A"/>
+                </a:solidFill>
+                <a:latin typeface="Arial"/>
+              </a:rPr>
+              <a:t>Urgent project decisions.</a:t>
+            </a:r>
+          </a:p>
+          <a:p>
+            <a:pPr>
+              <a:spcAft>
+                <a:spcPts val="700"/>
+              </a:spcAft>
+            </a:pPr>
+            <a:r>
+              <a:rPr sz="1600" b="0" i="0">
+                <a:solidFill>
+                  <a:srgbClr val="1A1A1A"/>
+                </a:solidFill>
+                <a:latin typeface="Arial"/>
+              </a:rPr>
+              <a:t>So a programme on a deadline is not stuck for three months waiting for the next quarterly.</a:t>
+            </a:r>
+          </a:p>
+        </p:txBody>
+      </p:sp>
+      <p:sp>
+        <p:nvSpPr>
+          <p:cNvPr id="8" name="TextBox 7"/>
+          <p:cNvSpPr txBox="1"/>
+          <p:nvPr/>
+        </p:nvSpPr>
+        <p:spPr>
+          <a:xfrm>
+            <a:off x="658368" y="5715000"/>
+            <a:ext cx="10881360" cy="548640"/>
+          </a:xfrm>
+          <a:prstGeom prst="rect">
+            <a:avLst/>
+          </a:prstGeom>
+          <a:noFill/>
+        </p:spPr>
+        <p:txBody>
+          <a:bodyPr wrap="square">
+            <a:spAutoFit/>
+          </a:bodyPr>
+          <a:lstStyle/>
+          <a:p>
+            <a:r>
+              <a:rPr sz="1550" b="1" i="0">
+                <a:solidFill>
+                  <a:srgbClr val="006E96"/>
+                </a:solidFill>
+                <a:latin typeface="Arial"/>
+              </a:rPr>
+              <a:t>If the Board is slow, projects route around it — and you are back to no governance.</a:t>
+            </a:r>
+          </a:p>
+        </p:txBody>
+      </p:sp>
+      <p:sp>
+        <p:nvSpPr>
+          <p:cNvPr id="9" name="TextBox 8"/>
+          <p:cNvSpPr txBox="1"/>
+          <p:nvPr/>
+        </p:nvSpPr>
+        <p:spPr>
+          <a:xfrm>
+            <a:off x="457200" y="6473952"/>
+            <a:ext cx="7772400" cy="292608"/>
+          </a:xfrm>
+          <a:prstGeom prst="rect">
+            <a:avLst/>
+          </a:prstGeom>
+          <a:noFill/>
+        </p:spPr>
+        <p:txBody>
+          <a:bodyPr wrap="square">
+            <a:spAutoFit/>
+          </a:bodyPr>
+          <a:lstStyle/>
+          <a:p>
+            <a:r>
+              <a:rPr sz="900" b="0" i="0">
+                <a:solidFill>
+                  <a:srgbClr val="595959"/>
+                </a:solidFill>
+                <a:latin typeface="Arial"/>
+              </a:rPr>
+              <a:t>3.4 · Stand up an EA Board that can actually say no</a:t>
+            </a:r>
+          </a:p>
+        </p:txBody>
+      </p:sp>
+    </p:spTree>
+  </p:cSld>
+  <p:clrMapOvr>
+    <a:masterClrMapping/>
+  </p:clrMapOvr>
+</p:sld>
+</file>
+
+<file path=ppt/slides/slide35.xml><?xml version="1.0" encoding="utf-8"?>
+<p:sld xmlns:a="http://schemas.openxmlformats.org/drawingml/2006/main" xmlns:p="http://schemas.openxmlformats.org/presentationml/2006/main" xmlns:r="http://schemas.openxmlformats.org/officeDocument/2006/relationships">
+  <p:cSld>
+    <p:spTree>
+      <p:nvGrpSpPr>
+        <p:cNvPr id="1" name=""/>
+        <p:cNvGrpSpPr/>
+        <p:nvPr/>
+      </p:nvGrpSpPr>
+      <p:grpSpPr/>
+      <p:sp>
+        <p:nvSpPr>
+          <p:cNvPr id="2" name="Rectangle 1"/>
+          <p:cNvSpPr/>
+          <p:nvPr/>
+        </p:nvSpPr>
+        <p:spPr>
+          <a:xfrm>
+            <a:off x="457200" y="384048"/>
+            <a:ext cx="45720" cy="256032"/>
+          </a:xfrm>
+          <a:prstGeom prst="rect">
+            <a:avLst/>
+          </a:prstGeom>
+          <a:solidFill>
+            <a:srgbClr val="009CD6"/>
+          </a:solidFill>
+          <a:ln>
+            <a:noFill/>
+          </a:ln>
+          <a:effectLst/>
+        </p:spPr>
+        <p:style>
+          <a:lnRef idx="1">
+            <a:schemeClr val="accent1"/>
+          </a:lnRef>
+          <a:fillRef idx="3">
+            <a:schemeClr val="accent1"/>
+          </a:fillRef>
+          <a:effectRef idx="2">
+            <a:schemeClr val="accent1"/>
+          </a:effectRef>
+          <a:fontRef idx="minor">
+            <a:schemeClr val="lt1"/>
+          </a:fontRef>
+        </p:style>
+        <p:txBody>
+          <a:bodyPr rtlCol="0" anchor="ctr"/>
+          <a:lstStyle/>
+          <a:p>
+            <a:pPr algn="ctr"/>
+          </a:p>
+        </p:txBody>
+      </p:sp>
+      <p:sp>
+        <p:nvSpPr>
+          <p:cNvPr id="3" name="TextBox 2"/>
+          <p:cNvSpPr txBox="1"/>
+          <p:nvPr/>
+        </p:nvSpPr>
+        <p:spPr>
+          <a:xfrm>
+            <a:off x="621792" y="274320"/>
+            <a:ext cx="11247120" cy="914400"/>
+          </a:xfrm>
+          <a:prstGeom prst="rect">
+            <a:avLst/>
+          </a:prstGeom>
+          <a:noFill/>
+        </p:spPr>
+        <p:txBody>
+          <a:bodyPr wrap="square">
+            <a:spAutoFit/>
+          </a:bodyPr>
+          <a:lstStyle/>
+          <a:p>
+            <a:r>
+              <a:rPr sz="2800" b="1" i="0">
+                <a:solidFill>
+                  <a:srgbClr val="1A1A1A"/>
+                </a:solidFill>
+                <a:latin typeface="Arial"/>
+              </a:rPr>
+              <a:t>The Board is the standing rhythm no single project can provide</a:t>
+            </a:r>
+          </a:p>
+        </p:txBody>
+      </p:sp>
+      <p:sp>
+        <p:nvSpPr>
+          <p:cNvPr id="4" name="Oval 3"/>
+          <p:cNvSpPr/>
+          <p:nvPr/>
+        </p:nvSpPr>
+        <p:spPr>
+          <a:xfrm>
+            <a:off x="621792" y="1508760"/>
+            <a:ext cx="310896" cy="310896"/>
+          </a:xfrm>
+          <a:prstGeom prst="ellipse">
+            <a:avLst/>
+          </a:prstGeom>
+          <a:solidFill>
+            <a:srgbClr val="009CD6"/>
+          </a:solidFill>
+          <a:ln>
+            <a:noFill/>
+          </a:ln>
+          <a:effectLst/>
+        </p:spPr>
+        <p:style>
+          <a:lnRef idx="1">
+            <a:schemeClr val="accent1"/>
+          </a:lnRef>
+          <a:fillRef idx="3">
+            <a:schemeClr val="accent1"/>
+          </a:fillRef>
+          <a:effectRef idx="2">
+            <a:schemeClr val="accent1"/>
+          </a:effectRef>
+          <a:fontRef idx="minor">
+            <a:schemeClr val="lt1"/>
+          </a:fontRef>
+        </p:style>
+        <p:txBody>
+          <a:bodyPr rtlCol="0" anchor="ctr" lIns="0" rIns="0" tIns="0" bIns="0" wrap="square"/>
+          <a:lstStyle/>
+          <a:p>
+            <a:pPr algn="ctr"/>
+            <a:r>
+              <a:rPr sz="1300" b="1" i="0">
+                <a:solidFill>
+                  <a:srgbClr val="FFFFFF"/>
+                </a:solidFill>
+                <a:latin typeface="Arial"/>
+              </a:rPr>
+              <a:t>1</a:t>
+            </a:r>
+          </a:p>
+        </p:txBody>
+      </p:sp>
+      <p:sp>
+        <p:nvSpPr>
+          <p:cNvPr id="5" name="TextBox 4"/>
+          <p:cNvSpPr txBox="1"/>
+          <p:nvPr/>
+        </p:nvSpPr>
+        <p:spPr>
+          <a:xfrm>
+            <a:off x="1115568" y="1463040"/>
+            <a:ext cx="10527487" cy="1386839"/>
+          </a:xfrm>
+          <a:prstGeom prst="rect">
+            <a:avLst/>
+          </a:prstGeom>
+          <a:noFill/>
+        </p:spPr>
+        <p:txBody>
+          <a:bodyPr wrap="square">
+            <a:spAutoFit/>
+          </a:bodyPr>
+          <a:lstStyle/>
+          <a:p>
+            <a:pPr>
+              <a:spcAft>
+                <a:spcPts val="300"/>
+              </a:spcAft>
+            </a:pPr>
+            <a:r>
+              <a:rPr sz="1900" b="1" i="0">
+                <a:solidFill>
+                  <a:srgbClr val="1A1A1A"/>
+                </a:solidFill>
+                <a:latin typeface="Arial"/>
+              </a:rPr>
+              <a:t>The repository gives the shared picture</a:t>
+            </a:r>
+          </a:p>
+        </p:txBody>
+      </p:sp>
+      <p:sp>
+        <p:nvSpPr>
+          <p:cNvPr id="6" name="Rectangle 5"/>
+          <p:cNvSpPr/>
+          <p:nvPr/>
+        </p:nvSpPr>
+        <p:spPr>
+          <a:xfrm>
+            <a:off x="621792" y="2854452"/>
+            <a:ext cx="10881360" cy="12700"/>
+          </a:xfrm>
+          <a:prstGeom prst="rect">
+            <a:avLst/>
+          </a:prstGeom>
+          <a:solidFill>
+            <a:srgbClr val="DDECF4"/>
+          </a:solidFill>
+          <a:ln>
+            <a:noFill/>
+          </a:ln>
+          <a:effectLst/>
+        </p:spPr>
+        <p:style>
+          <a:lnRef idx="1">
+            <a:schemeClr val="accent1"/>
+          </a:lnRef>
+          <a:fillRef idx="3">
+            <a:schemeClr val="accent1"/>
+          </a:fillRef>
+          <a:effectRef idx="2">
+            <a:schemeClr val="accent1"/>
+          </a:effectRef>
+          <a:fontRef idx="minor">
+            <a:schemeClr val="lt1"/>
+          </a:fontRef>
+        </p:style>
+        <p:txBody>
+          <a:bodyPr rtlCol="0" anchor="ctr"/>
+          <a:lstStyle/>
+          <a:p>
+            <a:pPr algn="ctr"/>
+          </a:p>
+        </p:txBody>
+      </p:sp>
+      <p:sp>
+        <p:nvSpPr>
+          <p:cNvPr id="7" name="Oval 6"/>
+          <p:cNvSpPr/>
+          <p:nvPr/>
+        </p:nvSpPr>
+        <p:spPr>
+          <a:xfrm>
+            <a:off x="621792" y="2941319"/>
+            <a:ext cx="310896" cy="310896"/>
+          </a:xfrm>
+          <a:prstGeom prst="ellipse">
+            <a:avLst/>
+          </a:prstGeom>
+          <a:solidFill>
+            <a:srgbClr val="009CD6"/>
+          </a:solidFill>
+          <a:ln>
+            <a:noFill/>
+          </a:ln>
+          <a:effectLst/>
+        </p:spPr>
+        <p:style>
+          <a:lnRef idx="1">
+            <a:schemeClr val="accent1"/>
+          </a:lnRef>
+          <a:fillRef idx="3">
+            <a:schemeClr val="accent1"/>
+          </a:fillRef>
+          <a:effectRef idx="2">
+            <a:schemeClr val="accent1"/>
+          </a:effectRef>
+          <a:fontRef idx="minor">
+            <a:schemeClr val="lt1"/>
+          </a:fontRef>
+        </p:style>
+        <p:txBody>
+          <a:bodyPr rtlCol="0" anchor="ctr" lIns="0" rIns="0" tIns="0" bIns="0" wrap="square"/>
+          <a:lstStyle/>
+          <a:p>
+            <a:pPr algn="ctr"/>
+            <a:r>
+              <a:rPr sz="1300" b="1" i="0">
+                <a:solidFill>
+                  <a:srgbClr val="FFFFFF"/>
+                </a:solidFill>
+                <a:latin typeface="Arial"/>
+              </a:rPr>
+              <a:t>2</a:t>
+            </a:r>
+          </a:p>
+        </p:txBody>
+      </p:sp>
+      <p:sp>
+        <p:nvSpPr>
+          <p:cNvPr id="8" name="TextBox 7"/>
+          <p:cNvSpPr txBox="1"/>
+          <p:nvPr/>
+        </p:nvSpPr>
+        <p:spPr>
+          <a:xfrm>
+            <a:off x="1115568" y="2895600"/>
+            <a:ext cx="10527487" cy="1386839"/>
+          </a:xfrm>
+          <a:prstGeom prst="rect">
+            <a:avLst/>
+          </a:prstGeom>
+          <a:noFill/>
+        </p:spPr>
+        <p:txBody>
+          <a:bodyPr wrap="square">
+            <a:spAutoFit/>
+          </a:bodyPr>
+          <a:lstStyle/>
+          <a:p>
+            <a:pPr>
+              <a:spcAft>
+                <a:spcPts val="300"/>
+              </a:spcAft>
+            </a:pPr>
+            <a:r>
+              <a:rPr sz="1900" b="1" i="0">
+                <a:solidFill>
+                  <a:srgbClr val="1A1A1A"/>
+                </a:solidFill>
+                <a:latin typeface="Arial"/>
+              </a:rPr>
+              <a:t>The metamodel gives the shared words</a:t>
+            </a:r>
+          </a:p>
+        </p:txBody>
+      </p:sp>
+      <p:sp>
+        <p:nvSpPr>
+          <p:cNvPr id="9" name="Rectangle 8"/>
+          <p:cNvSpPr/>
+          <p:nvPr/>
+        </p:nvSpPr>
+        <p:spPr>
+          <a:xfrm>
+            <a:off x="621792" y="4287011"/>
+            <a:ext cx="10881360" cy="12700"/>
+          </a:xfrm>
+          <a:prstGeom prst="rect">
+            <a:avLst/>
+          </a:prstGeom>
+          <a:solidFill>
+            <a:srgbClr val="DDECF4"/>
+          </a:solidFill>
+          <a:ln>
+            <a:noFill/>
+          </a:ln>
+          <a:effectLst/>
+        </p:spPr>
+        <p:style>
+          <a:lnRef idx="1">
+            <a:schemeClr val="accent1"/>
+          </a:lnRef>
+          <a:fillRef idx="3">
+            <a:schemeClr val="accent1"/>
+          </a:fillRef>
+          <a:effectRef idx="2">
+            <a:schemeClr val="accent1"/>
+          </a:effectRef>
+          <a:fontRef idx="minor">
+            <a:schemeClr val="lt1"/>
+          </a:fontRef>
+        </p:style>
+        <p:txBody>
+          <a:bodyPr rtlCol="0" anchor="ctr"/>
+          <a:lstStyle/>
+          <a:p>
+            <a:pPr algn="ctr"/>
+          </a:p>
+        </p:txBody>
+      </p:sp>
+      <p:sp>
+        <p:nvSpPr>
+          <p:cNvPr id="10" name="Oval 9"/>
+          <p:cNvSpPr/>
+          <p:nvPr/>
+        </p:nvSpPr>
+        <p:spPr>
+          <a:xfrm>
+            <a:off x="621792" y="4373879"/>
+            <a:ext cx="310896" cy="310896"/>
+          </a:xfrm>
+          <a:prstGeom prst="ellipse">
+            <a:avLst/>
+          </a:prstGeom>
+          <a:solidFill>
+            <a:srgbClr val="009CD6"/>
+          </a:solidFill>
+          <a:ln>
+            <a:noFill/>
+          </a:ln>
+          <a:effectLst/>
+        </p:spPr>
+        <p:style>
+          <a:lnRef idx="1">
+            <a:schemeClr val="accent1"/>
+          </a:lnRef>
+          <a:fillRef idx="3">
+            <a:schemeClr val="accent1"/>
+          </a:fillRef>
+          <a:effectRef idx="2">
+            <a:schemeClr val="accent1"/>
+          </a:effectRef>
+          <a:fontRef idx="minor">
+            <a:schemeClr val="lt1"/>
+          </a:fontRef>
+        </p:style>
+        <p:txBody>
+          <a:bodyPr rtlCol="0" anchor="ctr" lIns="0" rIns="0" tIns="0" bIns="0" wrap="square"/>
+          <a:lstStyle/>
+          <a:p>
+            <a:pPr algn="ctr"/>
+            <a:r>
+              <a:rPr sz="1300" b="1" i="0">
+                <a:solidFill>
+                  <a:srgbClr val="FFFFFF"/>
+                </a:solidFill>
+                <a:latin typeface="Arial"/>
+              </a:rPr>
+              <a:t>3</a:t>
+            </a:r>
+          </a:p>
+        </p:txBody>
+      </p:sp>
+      <p:sp>
+        <p:nvSpPr>
+          <p:cNvPr id="11" name="TextBox 10"/>
+          <p:cNvSpPr txBox="1"/>
+          <p:nvPr/>
+        </p:nvSpPr>
+        <p:spPr>
+          <a:xfrm>
+            <a:off x="1115568" y="4328159"/>
+            <a:ext cx="10527487" cy="1386839"/>
+          </a:xfrm>
+          <a:prstGeom prst="rect">
+            <a:avLst/>
+          </a:prstGeom>
+          <a:noFill/>
+        </p:spPr>
+        <p:txBody>
+          <a:bodyPr wrap="square">
+            <a:spAutoFit/>
+          </a:bodyPr>
+          <a:lstStyle/>
+          <a:p>
+            <a:pPr>
+              <a:spcAft>
+                <a:spcPts val="300"/>
+              </a:spcAft>
+            </a:pPr>
+            <a:r>
+              <a:rPr sz="1900" b="1" i="0">
+                <a:solidFill>
+                  <a:srgbClr val="1A1A1A"/>
+                </a:solidFill>
+                <a:latin typeface="Arial"/>
+              </a:rPr>
+              <a:t>The Board gives the shared rhythm</a:t>
+            </a:r>
+          </a:p>
+          <a:p>
+            <a:pPr>
+              <a:spcAft>
+                <a:spcPts val="300"/>
+              </a:spcAft>
+            </a:pPr>
+            <a:r>
+              <a:rPr sz="1550" b="0" i="0">
+                <a:solidFill>
+                  <a:srgbClr val="595959"/>
+                </a:solidFill>
+                <a:latin typeface="Arial"/>
+              </a:rPr>
+              <a:t>A standing forum where the business side and the IT side decide together.</a:t>
+            </a:r>
+          </a:p>
+        </p:txBody>
+      </p:sp>
+      <p:sp>
+        <p:nvSpPr>
+          <p:cNvPr id="12" name="TextBox 11"/>
+          <p:cNvSpPr txBox="1"/>
+          <p:nvPr/>
+        </p:nvSpPr>
+        <p:spPr>
+          <a:xfrm>
+            <a:off x="658368" y="5870448"/>
+            <a:ext cx="10881360" cy="548640"/>
+          </a:xfrm>
+          <a:prstGeom prst="rect">
+            <a:avLst/>
+          </a:prstGeom>
+          <a:noFill/>
+        </p:spPr>
+        <p:txBody>
+          <a:bodyPr wrap="square">
+            <a:spAutoFit/>
+          </a:bodyPr>
+          <a:lstStyle/>
+          <a:p>
+            <a:r>
+              <a:rPr sz="1550" b="1" i="0">
+                <a:solidFill>
+                  <a:srgbClr val="006E96"/>
+                </a:solidFill>
+                <a:latin typeface="Arial"/>
+              </a:rPr>
+              <a:t>Four times a year, and whenever it is urgent, both sides sit down and decide together.</a:t>
+            </a:r>
+          </a:p>
+        </p:txBody>
+      </p:sp>
+      <p:sp>
+        <p:nvSpPr>
+          <p:cNvPr id="13" name="TextBox 12"/>
+          <p:cNvSpPr txBox="1"/>
+          <p:nvPr/>
+        </p:nvSpPr>
+        <p:spPr>
+          <a:xfrm>
+            <a:off x="457200" y="6473952"/>
+            <a:ext cx="7772400" cy="292608"/>
+          </a:xfrm>
+          <a:prstGeom prst="rect">
+            <a:avLst/>
+          </a:prstGeom>
+          <a:noFill/>
+        </p:spPr>
+        <p:txBody>
+          <a:bodyPr wrap="square">
+            <a:spAutoFit/>
+          </a:bodyPr>
+          <a:lstStyle/>
+          <a:p>
+            <a:r>
+              <a:rPr sz="900" b="0" i="0">
+                <a:solidFill>
+                  <a:srgbClr val="595959"/>
+                </a:solidFill>
+                <a:latin typeface="Arial"/>
+              </a:rPr>
+              <a:t>3.4 · Stand up an EA Board that can actually say no</a:t>
+            </a:r>
+          </a:p>
+        </p:txBody>
+      </p:sp>
+    </p:spTree>
+  </p:cSld>
+  <p:clrMapOvr>
+    <a:masterClrMapping/>
+  </p:clrMapOvr>
+</p:sld>
+</file>
+
+<file path=ppt/slides/slide36.xml><?xml version="1.0" encoding="utf-8"?>
+<p:sld xmlns:a="http://schemas.openxmlformats.org/drawingml/2006/main" xmlns:p="http://schemas.openxmlformats.org/presentationml/2006/main" xmlns:r="http://schemas.openxmlformats.org/officeDocument/2006/relationships">
+  <p:cSld>
+    <p:spTree>
+      <p:nvGrpSpPr>
+        <p:cNvPr id="1" name=""/>
+        <p:cNvGrpSpPr/>
+        <p:nvPr/>
+      </p:nvGrpSpPr>
+      <p:grpSpPr/>
+      <p:sp>
+        <p:nvSpPr>
           <p:cNvPr id="2" name="TextBox 1"/>
           <p:cNvSpPr txBox="1"/>
           <p:nvPr/>
@@ -14959,7 +14512,7 @@
 </p:sld>
 </file>
 
-<file path=ppt/slides/slide33.xml><?xml version="1.0" encoding="utf-8"?>
+<file path=ppt/slides/slide37.xml><?xml version="1.0" encoding="utf-8"?>
 <p:sld xmlns:a="http://schemas.openxmlformats.org/drawingml/2006/main" xmlns:p="http://schemas.openxmlformats.org/presentationml/2006/main" xmlns:r="http://schemas.openxmlformats.org/officeDocument/2006/relationships">
   <p:cSld>
     <p:spTree>

--- a/10-Knowledge-Products/KP1-GEA/videos/module_3/en/decks/KP1_M3_3.4_Deck_v0.2.pptx
+++ b/10-Knowledge-Products/KP1-GEA/videos/module_3/en/decks/KP1_M3_3.4_Deck_v0.2.pptx
@@ -11836,7 +11836,7 @@
                 </a:solidFill>
                 <a:latin typeface="Arial"/>
               </a:rPr>
-              <a:t>~4 minutes · standalone video · voice-over on text slides</a:t>
+              <a:t>standalone video · voice-over on text slides</a:t>
             </a:r>
           </a:p>
         </p:txBody>

--- a/10-Knowledge-Products/KP1-GEA/videos/module_3/en/decks/KP1_M3_3.4_Deck_v0.2.pptx
+++ b/10-Knowledge-Products/KP1-GEA/videos/module_3/en/decks/KP1_M3_3.4_Deck_v0.2.pptx
@@ -11700,7 +11700,7 @@
                 </a:solidFill>
                 <a:latin typeface="Arial"/>
               </a:rPr>
-              <a:t>KP1 · MODULE 3 · VIDEO 3.4</a:t>
+              <a:t>MODULE 3 · VIDEO 3.4</a:t>
             </a:r>
           </a:p>
         </p:txBody>
